--- a/Rapport_projet_SRTP.pptx
+++ b/Rapport_projet_SRTP.pptx
@@ -1,6 +1,6 @@
 
 <file path=ppt/presentation.xml><?xml version="1.0" encoding="utf-8"?>
-<p:presentation xmlns:a="http://schemas.openxmlformats.org/drawingml/2006/main" xmlns:r="http://schemas.openxmlformats.org/officeDocument/2006/relationships" xmlns:p="http://schemas.openxmlformats.org/presentationml/2006/main" saveSubsetFonts="1">
+<p:presentation xmlns:a="http://schemas.openxmlformats.org/drawingml/2006/main" xmlns:r="http://schemas.openxmlformats.org/officeDocument/2006/relationships" xmlns:p="http://schemas.openxmlformats.org/presentationml/2006/main" showSpecialPlsOnTitleSld="0" saveSubsetFonts="1">
   <p:sldMasterIdLst>
     <p:sldMasterId id="2147483648" r:id="rId1"/>
   </p:sldMasterIdLst>
@@ -124,6 +124,14 @@
 </p:presentation>
 </file>
 
+<file path=ppt/revisionInfo.xml><?xml version="1.0" encoding="utf-8"?>
+<p1510:revInfo xmlns:a="http://schemas.openxmlformats.org/drawingml/2006/main" xmlns:r="http://schemas.openxmlformats.org/officeDocument/2006/relationships" xmlns:p1510="http://schemas.microsoft.com/office/powerpoint/2015/10/main">
+  <p1510:revLst>
+    <p1510:client id="{4BE761C7-A3F9-14C5-3161-1B8A9EBBDBA1}" v="83" dt="2026-03-23T22:34:45.865"/>
+  </p1510:revLst>
+</p1510:revInfo>
+</file>
+
 <file path=ppt/notesMasters/notesMaster1.xml><?xml version="1.0" encoding="utf-8"?>
 <p:notesMaster xmlns:a="http://schemas.openxmlformats.org/drawingml/2006/main" xmlns:r="http://schemas.openxmlformats.org/officeDocument/2006/relationships" xmlns:p="http://schemas.openxmlformats.org/presentationml/2006/main">
   <p:cSld>
@@ -365,7 +373,7 @@
           <a:p>
             <a:fld id="{64EBDF11-E6C0-49D4-AA9D-12CE67B77172}" type="slidenum">
               <a:rPr lang="fr-BE" smtClean="0"/>
-              <a:t>‹N°›</a:t>
+              <a:t>‹#›</a:t>
             </a:fld>
             <a:endParaRPr lang="fr-BE"/>
           </a:p>
@@ -677,7 +685,7 @@
           <a:p>
             <a:fld id="{6D78B8F9-767A-4546-9D20-2187B79FBE53}" type="slidenum">
               <a:rPr lang="fr-BE" smtClean="0"/>
-              <a:t>‹N°›</a:t>
+              <a:t>‹#›</a:t>
             </a:fld>
             <a:endParaRPr lang="fr-BE"/>
           </a:p>
@@ -877,7 +885,7 @@
           <a:p>
             <a:fld id="{6D78B8F9-767A-4546-9D20-2187B79FBE53}" type="slidenum">
               <a:rPr lang="fr-BE" smtClean="0"/>
-              <a:t>‹N°›</a:t>
+              <a:t>‹#›</a:t>
             </a:fld>
             <a:endParaRPr lang="fr-BE"/>
           </a:p>
@@ -1087,7 +1095,7 @@
           <a:p>
             <a:fld id="{6D78B8F9-767A-4546-9D20-2187B79FBE53}" type="slidenum">
               <a:rPr lang="fr-BE" smtClean="0"/>
-              <a:t>‹N°›</a:t>
+              <a:t>‹#›</a:t>
             </a:fld>
             <a:endParaRPr lang="fr-BE"/>
           </a:p>
@@ -1287,7 +1295,7 @@
           <a:p>
             <a:fld id="{6D78B8F9-767A-4546-9D20-2187B79FBE53}" type="slidenum">
               <a:rPr lang="fr-BE" smtClean="0"/>
-              <a:t>‹N°›</a:t>
+              <a:t>‹#›</a:t>
             </a:fld>
             <a:endParaRPr lang="fr-BE"/>
           </a:p>
@@ -1563,7 +1571,7 @@
           <a:p>
             <a:fld id="{6D78B8F9-767A-4546-9D20-2187B79FBE53}" type="slidenum">
               <a:rPr lang="fr-BE" smtClean="0"/>
-              <a:t>‹N°›</a:t>
+              <a:t>‹#›</a:t>
             </a:fld>
             <a:endParaRPr lang="fr-BE"/>
           </a:p>
@@ -1831,7 +1839,7 @@
           <a:p>
             <a:fld id="{6D78B8F9-767A-4546-9D20-2187B79FBE53}" type="slidenum">
               <a:rPr lang="fr-BE" smtClean="0"/>
-              <a:t>‹N°›</a:t>
+              <a:t>‹#›</a:t>
             </a:fld>
             <a:endParaRPr lang="fr-BE"/>
           </a:p>
@@ -2246,7 +2254,7 @@
           <a:p>
             <a:fld id="{6D78B8F9-767A-4546-9D20-2187B79FBE53}" type="slidenum">
               <a:rPr lang="fr-BE" smtClean="0"/>
-              <a:t>‹N°›</a:t>
+              <a:t>‹#›</a:t>
             </a:fld>
             <a:endParaRPr lang="fr-BE"/>
           </a:p>
@@ -2388,7 +2396,7 @@
           <a:p>
             <a:fld id="{6D78B8F9-767A-4546-9D20-2187B79FBE53}" type="slidenum">
               <a:rPr lang="fr-BE" smtClean="0"/>
-              <a:t>‹N°›</a:t>
+              <a:t>‹#›</a:t>
             </a:fld>
             <a:endParaRPr lang="fr-BE"/>
           </a:p>
@@ -2501,7 +2509,7 @@
           <a:p>
             <a:fld id="{6D78B8F9-767A-4546-9D20-2187B79FBE53}" type="slidenum">
               <a:rPr lang="fr-BE" smtClean="0"/>
-              <a:t>‹N°›</a:t>
+              <a:t>‹#›</a:t>
             </a:fld>
             <a:endParaRPr lang="fr-BE"/>
           </a:p>
@@ -2814,7 +2822,7 @@
           <a:p>
             <a:fld id="{6D78B8F9-767A-4546-9D20-2187B79FBE53}" type="slidenum">
               <a:rPr lang="fr-BE" smtClean="0"/>
-              <a:t>‹N°›</a:t>
+              <a:t>‹#›</a:t>
             </a:fld>
             <a:endParaRPr lang="fr-BE"/>
           </a:p>
@@ -3103,7 +3111,7 @@
           <a:p>
             <a:fld id="{6D78B8F9-767A-4546-9D20-2187B79FBE53}" type="slidenum">
               <a:rPr lang="fr-BE" smtClean="0"/>
-              <a:t>‹N°›</a:t>
+              <a:t>‹#›</a:t>
             </a:fld>
             <a:endParaRPr lang="fr-BE"/>
           </a:p>
@@ -3382,7 +3390,7 @@
           <a:p>
             <a:fld id="{6D78B8F9-767A-4546-9D20-2187B79FBE53}" type="slidenum">
               <a:rPr lang="fr-BE" smtClean="0"/>
-              <a:t>‹N°›</a:t>
+              <a:t>‹#›</a:t>
             </a:fld>
             <a:endParaRPr lang="fr-BE"/>
           </a:p>
@@ -3787,35 +3795,6 @@
           </a:p>
         </p:txBody>
       </p:sp>
-      <p:sp>
-        <p:nvSpPr>
-          <p:cNvPr id="4" name="Espace réservé du numéro de diapositive 3">
-            <a:extLst>
-              <a:ext uri="{FF2B5EF4-FFF2-40B4-BE49-F238E27FC236}">
-                <a16:creationId xmlns:a16="http://schemas.microsoft.com/office/drawing/2014/main" id="{35F2E016-3249-9AF9-3FF4-0EDD024D807A}"/>
-              </a:ext>
-            </a:extLst>
-          </p:cNvPr>
-          <p:cNvSpPr>
-            <a:spLocks noGrp="1"/>
-          </p:cNvSpPr>
-          <p:nvPr>
-            <p:ph type="sldNum" sz="quarter" idx="12"/>
-          </p:nvPr>
-        </p:nvSpPr>
-        <p:spPr/>
-        <p:txBody>
-          <a:bodyPr/>
-          <a:lstStyle/>
-          <a:p>
-            <a:fld id="{6D78B8F9-767A-4546-9D20-2187B79FBE53}" type="slidenum">
-              <a:rPr lang="fr-BE" smtClean="0"/>
-              <a:t>1</a:t>
-            </a:fld>
-            <a:endParaRPr lang="fr-BE"/>
-          </a:p>
-        </p:txBody>
-      </p:sp>
     </p:spTree>
     <p:extLst>
       <p:ext uri="{BB962C8B-B14F-4D97-AF65-F5344CB8AC3E}">
@@ -4757,20 +4736,20 @@
         </p:nvSpPr>
         <p:spPr/>
         <p:txBody>
-          <a:bodyPr>
+          <a:bodyPr vert="horz" lIns="91440" tIns="45720" rIns="91440" bIns="45720" rtlCol="0" anchor="t">
             <a:normAutofit/>
           </a:bodyPr>
           <a:lstStyle/>
           <a:p>
             <a:r>
-              <a:rPr lang="fr-BE" dirty="0"/>
-              <a:t>Mesures : débit (bytes/sec), temps de transfert, nombre de retransmissions</a:t>
-            </a:r>
-          </a:p>
-          <a:p>
-            <a:r>
-              <a:rPr lang="fr-BE" dirty="0"/>
-              <a:t>Scénarios : réseau parfait, pertes, fichiers de tailles variés</a:t>
+              <a:rPr lang="fr-BE"/>
+              <a:t>Mesures : débit (bytes/sec) vs temps de transfert</a:t>
+            </a:r>
+          </a:p>
+          <a:p>
+            <a:r>
+              <a:rPr lang="fr-BE"/>
+              <a:t>Scénarios : réseau parfait, fichiers de tailles variés, pertes</a:t>
             </a:r>
           </a:p>
           <a:p>
@@ -4849,6 +4828,14 @@
 <file path=ppt/slides/slide8.xml><?xml version="1.0" encoding="utf-8"?>
 <p:sld xmlns:a="http://schemas.openxmlformats.org/drawingml/2006/main" xmlns:r="http://schemas.openxmlformats.org/officeDocument/2006/relationships" xmlns:p="http://schemas.openxmlformats.org/presentationml/2006/main">
   <p:cSld>
+    <p:bg>
+      <p:bgPr>
+        <a:solidFill>
+          <a:schemeClr val="bg1"/>
+        </a:solidFill>
+        <a:effectLst/>
+      </p:bgPr>
+    </p:bg>
     <p:spTree>
       <p:nvGrpSpPr>
         <p:cNvPr id="1" name=""/>
@@ -4863,1883 +4850,155 @@
           <a:chExt cx="0" cy="0"/>
         </a:xfrm>
       </p:grpSpPr>
-      <p:sp>
-        <p:nvSpPr>
-          <p:cNvPr id="3" name="Espace réservé du contenu 2">
-            <a:extLst>
-              <a:ext uri="{FF2B5EF4-FFF2-40B4-BE49-F238E27FC236}">
-                <a16:creationId xmlns:a16="http://schemas.microsoft.com/office/drawing/2014/main" id="{B3594255-E7EC-3F1F-DEE5-9B856BC9339B}"/>
-              </a:ext>
-            </a:extLst>
-          </p:cNvPr>
-          <p:cNvSpPr>
-            <a:spLocks noGrp="1"/>
-          </p:cNvSpPr>
-          <p:nvPr>
-            <p:ph idx="1"/>
-          </p:nvPr>
-        </p:nvSpPr>
+      <p:pic>
+        <p:nvPicPr>
+          <p:cNvPr id="17" name="Picture 16">
+            <a:extLst>
+              <a:ext uri="{FF2B5EF4-FFF2-40B4-BE49-F238E27FC236}">
+                <a16:creationId xmlns:a16="http://schemas.microsoft.com/office/drawing/2014/main" id="{29D71149-A580-7FA6-0B06-E981B7D78A39}"/>
+              </a:ext>
+            </a:extLst>
+          </p:cNvPr>
+          <p:cNvPicPr>
+            <a:picLocks noChangeAspect="1"/>
+          </p:cNvPicPr>
+          <p:nvPr/>
+        </p:nvPicPr>
+        <p:blipFill>
+          <a:blip r:embed="rId2"/>
+          <a:stretch>
+            <a:fillRect/>
+          </a:stretch>
+        </p:blipFill>
         <p:spPr>
           <a:xfrm>
-            <a:off x="838200" y="0"/>
-            <a:ext cx="10515600" cy="6766560"/>
-          </a:xfrm>
-        </p:spPr>
-        <p:txBody>
-          <a:bodyPr/>
-          <a:lstStyle/>
-          <a:p>
-            <a:pPr marL="0" indent="0">
-              <a:buNone/>
-            </a:pPr>
-            <a:r>
-              <a:rPr lang="fr-BE" dirty="0"/>
-              <a:t> </a:t>
-            </a:r>
-          </a:p>
-        </p:txBody>
-      </p:sp>
-      <p:graphicFrame>
-        <p:nvGraphicFramePr>
-          <p:cNvPr id="4" name="Tableau 3">
-            <a:extLst>
-              <a:ext uri="{FF2B5EF4-FFF2-40B4-BE49-F238E27FC236}">
-                <a16:creationId xmlns:a16="http://schemas.microsoft.com/office/drawing/2014/main" id="{A3FA5860-7BE6-9223-B071-F70F567C7CBF}"/>
-              </a:ext>
-            </a:extLst>
-          </p:cNvPr>
-          <p:cNvGraphicFramePr>
-            <a:graphicFrameLocks noGrp="1"/>
-          </p:cNvGraphicFramePr>
-          <p:nvPr>
-            <p:extLst>
-              <p:ext uri="{D42A27DB-BD31-4B8C-83A1-F6EECF244321}">
-                <p14:modId xmlns:p14="http://schemas.microsoft.com/office/powerpoint/2010/main" val="2237111868"/>
-              </p:ext>
-            </p:extLst>
-          </p:nvPr>
-        </p:nvGraphicFramePr>
-        <p:xfrm>
-          <a:off x="838200" y="561364"/>
-          <a:ext cx="7464552" cy="1463040"/>
-        </p:xfrm>
-        <a:graphic>
-          <a:graphicData uri="http://schemas.openxmlformats.org/drawingml/2006/table">
-            <a:tbl>
-              <a:tblPr/>
-              <a:tblGrid>
-                <a:gridCol w="1866138">
-                  <a:extLst>
-                    <a:ext uri="{9D8B030D-6E8A-4147-A177-3AD203B41FA5}">
-                      <a16:colId xmlns:a16="http://schemas.microsoft.com/office/drawing/2014/main" val="2205102735"/>
-                    </a:ext>
-                  </a:extLst>
-                </a:gridCol>
-                <a:gridCol w="1866138">
-                  <a:extLst>
-                    <a:ext uri="{9D8B030D-6E8A-4147-A177-3AD203B41FA5}">
-                      <a16:colId xmlns:a16="http://schemas.microsoft.com/office/drawing/2014/main" val="1732646216"/>
-                    </a:ext>
-                  </a:extLst>
-                </a:gridCol>
-                <a:gridCol w="1866138">
-                  <a:extLst>
-                    <a:ext uri="{9D8B030D-6E8A-4147-A177-3AD203B41FA5}">
-                      <a16:colId xmlns:a16="http://schemas.microsoft.com/office/drawing/2014/main" val="797674455"/>
-                    </a:ext>
-                  </a:extLst>
-                </a:gridCol>
-                <a:gridCol w="1866138">
-                  <a:extLst>
-                    <a:ext uri="{9D8B030D-6E8A-4147-A177-3AD203B41FA5}">
-                      <a16:colId xmlns:a16="http://schemas.microsoft.com/office/drawing/2014/main" val="1703387754"/>
-                    </a:ext>
-                  </a:extLst>
-                </a:gridCol>
-              </a:tblGrid>
-              <a:tr h="0">
-                <a:tc>
-                  <a:txBody>
-                    <a:bodyPr/>
-                    <a:lstStyle/>
-                    <a:p>
-                      <a:pPr>
-                        <a:buNone/>
-                      </a:pPr>
-                      <a:r>
-                        <a:rPr lang="fr-BE" dirty="0"/>
-                        <a:t>Taille fichier</a:t>
-                      </a:r>
-                    </a:p>
-                  </a:txBody>
-                  <a:tcPr anchor="ctr">
-                    <a:lnL>
-                      <a:noFill/>
-                    </a:lnL>
-                    <a:lnR>
-                      <a:noFill/>
-                    </a:lnR>
-                    <a:lnT>
-                      <a:noFill/>
-                    </a:lnT>
-                    <a:lnB>
-                      <a:noFill/>
-                    </a:lnB>
-                    <a:noFill/>
-                  </a:tcPr>
-                </a:tc>
-                <a:tc>
-                  <a:txBody>
-                    <a:bodyPr/>
-                    <a:lstStyle/>
-                    <a:p>
-                      <a:pPr>
-                        <a:buNone/>
-                      </a:pPr>
-                      <a:r>
-                        <a:rPr lang="fr-BE"/>
-                        <a:t>Temps</a:t>
-                      </a:r>
-                    </a:p>
-                  </a:txBody>
-                  <a:tcPr anchor="ctr">
-                    <a:lnL>
-                      <a:noFill/>
-                    </a:lnL>
-                    <a:lnR>
-                      <a:noFill/>
-                    </a:lnR>
-                    <a:lnT>
-                      <a:noFill/>
-                    </a:lnT>
-                    <a:lnB>
-                      <a:noFill/>
-                    </a:lnB>
-                    <a:noFill/>
-                  </a:tcPr>
-                </a:tc>
-                <a:tc>
-                  <a:txBody>
-                    <a:bodyPr/>
-                    <a:lstStyle/>
-                    <a:p>
-                      <a:pPr>
-                        <a:buNone/>
-                      </a:pPr>
-                      <a:r>
-                        <a:rPr lang="fr-BE"/>
-                        <a:t>Débit</a:t>
-                      </a:r>
-                    </a:p>
-                  </a:txBody>
-                  <a:tcPr anchor="ctr">
-                    <a:lnL>
-                      <a:noFill/>
-                    </a:lnL>
-                    <a:lnR>
-                      <a:noFill/>
-                    </a:lnR>
-                    <a:lnT>
-                      <a:noFill/>
-                    </a:lnT>
-                    <a:lnB>
-                      <a:noFill/>
-                    </a:lnB>
-                    <a:noFill/>
-                  </a:tcPr>
-                </a:tc>
-                <a:tc>
-                  <a:txBody>
-                    <a:bodyPr/>
-                    <a:lstStyle/>
-                    <a:p>
-                      <a:pPr>
-                        <a:buNone/>
-                      </a:pPr>
-                      <a:r>
-                        <a:rPr lang="fr-BE"/>
-                        <a:t>Retransmissions</a:t>
-                      </a:r>
-                    </a:p>
-                  </a:txBody>
-                  <a:tcPr anchor="ctr">
-                    <a:lnL>
-                      <a:noFill/>
-                    </a:lnL>
-                    <a:lnR>
-                      <a:noFill/>
-                    </a:lnR>
-                    <a:lnT>
-                      <a:noFill/>
-                    </a:lnT>
-                    <a:lnB>
-                      <a:noFill/>
-                    </a:lnB>
-                    <a:noFill/>
-                  </a:tcPr>
-                </a:tc>
-                <a:extLst>
-                  <a:ext uri="{0D108BD9-81ED-4DB2-BD59-A6C34878D82A}">
-                    <a16:rowId xmlns:a16="http://schemas.microsoft.com/office/drawing/2014/main" val="104180528"/>
-                  </a:ext>
-                </a:extLst>
-              </a:tr>
-              <a:tr h="0">
-                <a:tc>
-                  <a:txBody>
-                    <a:bodyPr/>
-                    <a:lstStyle/>
-                    <a:p>
-                      <a:pPr>
-                        <a:buNone/>
-                      </a:pPr>
-                      <a:r>
-                        <a:rPr lang="fr-BE"/>
-                        <a:t>500 B</a:t>
-                      </a:r>
-                    </a:p>
-                  </a:txBody>
-                  <a:tcPr anchor="ctr">
-                    <a:lnL>
-                      <a:noFill/>
-                    </a:lnL>
-                    <a:lnR>
-                      <a:noFill/>
-                    </a:lnR>
-                    <a:lnT>
-                      <a:noFill/>
-                    </a:lnT>
-                    <a:lnB>
-                      <a:noFill/>
-                    </a:lnB>
-                    <a:noFill/>
-                  </a:tcPr>
-                </a:tc>
-                <a:tc>
-                  <a:txBody>
-                    <a:bodyPr/>
-                    <a:lstStyle/>
-                    <a:p>
-                      <a:pPr>
-                        <a:buNone/>
-                      </a:pPr>
-                      <a:r>
-                        <a:rPr lang="fr-BE" dirty="0"/>
-                        <a:t>6 ms</a:t>
-                      </a:r>
-                    </a:p>
-                  </a:txBody>
-                  <a:tcPr anchor="ctr">
-                    <a:lnL>
-                      <a:noFill/>
-                    </a:lnL>
-                    <a:lnR>
-                      <a:noFill/>
-                    </a:lnR>
-                    <a:lnT>
-                      <a:noFill/>
-                    </a:lnT>
-                    <a:lnB>
-                      <a:noFill/>
-                    </a:lnB>
-                    <a:noFill/>
-                  </a:tcPr>
-                </a:tc>
-                <a:tc>
-                  <a:txBody>
-                    <a:bodyPr/>
-                    <a:lstStyle/>
-                    <a:p>
-                      <a:pPr>
-                        <a:buNone/>
-                      </a:pPr>
-                      <a:r>
-                        <a:rPr lang="fr-BE" dirty="0"/>
-                        <a:t>98 KB/s</a:t>
-                      </a:r>
-                    </a:p>
-                  </a:txBody>
-                  <a:tcPr anchor="ctr">
-                    <a:lnL>
-                      <a:noFill/>
-                    </a:lnL>
-                    <a:lnR>
-                      <a:noFill/>
-                    </a:lnR>
-                    <a:lnT>
-                      <a:noFill/>
-                    </a:lnT>
-                    <a:lnB>
-                      <a:noFill/>
-                    </a:lnB>
-                    <a:noFill/>
-                  </a:tcPr>
-                </a:tc>
-                <a:tc>
-                  <a:txBody>
-                    <a:bodyPr/>
-                    <a:lstStyle/>
-                    <a:p>
-                      <a:pPr>
-                        <a:buNone/>
-                      </a:pPr>
-                      <a:r>
-                        <a:rPr lang="fr-BE"/>
-                        <a:t>0</a:t>
-                      </a:r>
-                    </a:p>
-                  </a:txBody>
-                  <a:tcPr anchor="ctr">
-                    <a:lnL>
-                      <a:noFill/>
-                    </a:lnL>
-                    <a:lnR>
-                      <a:noFill/>
-                    </a:lnR>
-                    <a:lnT>
-                      <a:noFill/>
-                    </a:lnT>
-                    <a:lnB>
-                      <a:noFill/>
-                    </a:lnB>
-                    <a:noFill/>
-                  </a:tcPr>
-                </a:tc>
-                <a:extLst>
-                  <a:ext uri="{0D108BD9-81ED-4DB2-BD59-A6C34878D82A}">
-                    <a16:rowId xmlns:a16="http://schemas.microsoft.com/office/drawing/2014/main" val="206193627"/>
-                  </a:ext>
-                </a:extLst>
-              </a:tr>
-              <a:tr h="0">
-                <a:tc>
-                  <a:txBody>
-                    <a:bodyPr/>
-                    <a:lstStyle/>
-                    <a:p>
-                      <a:pPr>
-                        <a:buNone/>
-                      </a:pPr>
-                      <a:r>
-                        <a:rPr lang="fr-BE"/>
-                        <a:t>5 KB</a:t>
-                      </a:r>
-                    </a:p>
-                  </a:txBody>
-                  <a:tcPr anchor="ctr">
-                    <a:lnL>
-                      <a:noFill/>
-                    </a:lnL>
-                    <a:lnR>
-                      <a:noFill/>
-                    </a:lnR>
-                    <a:lnT>
-                      <a:noFill/>
-                    </a:lnT>
-                    <a:lnB>
-                      <a:noFill/>
-                    </a:lnB>
-                    <a:noFill/>
-                  </a:tcPr>
-                </a:tc>
-                <a:tc>
-                  <a:txBody>
-                    <a:bodyPr/>
-                    <a:lstStyle/>
-                    <a:p>
-                      <a:pPr>
-                        <a:buNone/>
-                      </a:pPr>
-                      <a:r>
-                        <a:rPr lang="fr-BE" dirty="0"/>
-                        <a:t>17 ms</a:t>
-                      </a:r>
-                    </a:p>
-                  </a:txBody>
-                  <a:tcPr anchor="ctr">
-                    <a:lnL>
-                      <a:noFill/>
-                    </a:lnL>
-                    <a:lnR>
-                      <a:noFill/>
-                    </a:lnR>
-                    <a:lnT>
-                      <a:noFill/>
-                    </a:lnT>
-                    <a:lnB>
-                      <a:noFill/>
-                    </a:lnB>
-                    <a:noFill/>
-                  </a:tcPr>
-                </a:tc>
-                <a:tc>
-                  <a:txBody>
-                    <a:bodyPr/>
-                    <a:lstStyle/>
-                    <a:p>
-                      <a:pPr>
-                        <a:buNone/>
-                      </a:pPr>
-                      <a:r>
-                        <a:rPr lang="fr-BE" dirty="0"/>
-                        <a:t>324 KB/s</a:t>
-                      </a:r>
-                    </a:p>
-                  </a:txBody>
-                  <a:tcPr anchor="ctr">
-                    <a:lnL>
-                      <a:noFill/>
-                    </a:lnL>
-                    <a:lnR>
-                      <a:noFill/>
-                    </a:lnR>
-                    <a:lnT>
-                      <a:noFill/>
-                    </a:lnT>
-                    <a:lnB>
-                      <a:noFill/>
-                    </a:lnB>
-                    <a:noFill/>
-                  </a:tcPr>
-                </a:tc>
-                <a:tc>
-                  <a:txBody>
-                    <a:bodyPr/>
-                    <a:lstStyle/>
-                    <a:p>
-                      <a:pPr>
-                        <a:buNone/>
-                      </a:pPr>
-                      <a:r>
-                        <a:rPr lang="fr-BE"/>
-                        <a:t>0</a:t>
-                      </a:r>
-                    </a:p>
-                  </a:txBody>
-                  <a:tcPr anchor="ctr">
-                    <a:lnL>
-                      <a:noFill/>
-                    </a:lnL>
-                    <a:lnR>
-                      <a:noFill/>
-                    </a:lnR>
-                    <a:lnT>
-                      <a:noFill/>
-                    </a:lnT>
-                    <a:lnB>
-                      <a:noFill/>
-                    </a:lnB>
-                    <a:noFill/>
-                  </a:tcPr>
-                </a:tc>
-                <a:extLst>
-                  <a:ext uri="{0D108BD9-81ED-4DB2-BD59-A6C34878D82A}">
-                    <a16:rowId xmlns:a16="http://schemas.microsoft.com/office/drawing/2014/main" val="2301649309"/>
-                  </a:ext>
-                </a:extLst>
-              </a:tr>
-              <a:tr h="0">
-                <a:tc>
-                  <a:txBody>
-                    <a:bodyPr/>
-                    <a:lstStyle/>
-                    <a:p>
-                      <a:pPr>
-                        <a:buNone/>
-                      </a:pPr>
-                      <a:r>
-                        <a:rPr lang="fr-BE"/>
-                        <a:t>50 KB</a:t>
-                      </a:r>
-                    </a:p>
-                  </a:txBody>
-                  <a:tcPr anchor="ctr">
-                    <a:lnL>
-                      <a:noFill/>
-                    </a:lnL>
-                    <a:lnR>
-                      <a:noFill/>
-                    </a:lnR>
-                    <a:lnT>
-                      <a:noFill/>
-                    </a:lnT>
-                    <a:lnB>
-                      <a:noFill/>
-                    </a:lnB>
-                    <a:noFill/>
-                  </a:tcPr>
-                </a:tc>
-                <a:tc>
-                  <a:txBody>
-                    <a:bodyPr/>
-                    <a:lstStyle/>
-                    <a:p>
-                      <a:pPr>
-                        <a:buNone/>
-                      </a:pPr>
-                      <a:r>
-                        <a:rPr lang="fr-BE" dirty="0"/>
-                        <a:t>85 ms</a:t>
-                      </a:r>
-                    </a:p>
-                  </a:txBody>
-                  <a:tcPr anchor="ctr">
-                    <a:lnL>
-                      <a:noFill/>
-                    </a:lnL>
-                    <a:lnR>
-                      <a:noFill/>
-                    </a:lnR>
-                    <a:lnT>
-                      <a:noFill/>
-                    </a:lnT>
-                    <a:lnB>
-                      <a:noFill/>
-                    </a:lnB>
-                    <a:noFill/>
-                  </a:tcPr>
-                </a:tc>
-                <a:tc>
-                  <a:txBody>
-                    <a:bodyPr/>
-                    <a:lstStyle/>
-                    <a:p>
-                      <a:pPr>
-                        <a:buNone/>
-                      </a:pPr>
-                      <a:r>
-                        <a:rPr lang="fr-BE" dirty="0"/>
-                        <a:t>619 KB/s</a:t>
-                      </a:r>
-                    </a:p>
-                  </a:txBody>
-                  <a:tcPr anchor="ctr">
-                    <a:lnL>
-                      <a:noFill/>
-                    </a:lnL>
-                    <a:lnR>
-                      <a:noFill/>
-                    </a:lnR>
-                    <a:lnT>
-                      <a:noFill/>
-                    </a:lnT>
-                    <a:lnB>
-                      <a:noFill/>
-                    </a:lnB>
-                    <a:noFill/>
-                  </a:tcPr>
-                </a:tc>
-                <a:tc>
-                  <a:txBody>
-                    <a:bodyPr/>
-                    <a:lstStyle/>
-                    <a:p>
-                      <a:pPr>
-                        <a:buNone/>
-                      </a:pPr>
-                      <a:r>
-                        <a:rPr lang="fr-BE" dirty="0"/>
-                        <a:t>0</a:t>
-                      </a:r>
-                    </a:p>
-                  </a:txBody>
-                  <a:tcPr anchor="ctr">
-                    <a:lnL>
-                      <a:noFill/>
-                    </a:lnL>
-                    <a:lnR>
-                      <a:noFill/>
-                    </a:lnR>
-                    <a:lnT>
-                      <a:noFill/>
-                    </a:lnT>
-                    <a:lnB>
-                      <a:noFill/>
-                    </a:lnB>
-                    <a:noFill/>
-                  </a:tcPr>
-                </a:tc>
-                <a:extLst>
-                  <a:ext uri="{0D108BD9-81ED-4DB2-BD59-A6C34878D82A}">
-                    <a16:rowId xmlns:a16="http://schemas.microsoft.com/office/drawing/2014/main" val="4152128043"/>
-                  </a:ext>
-                </a:extLst>
-              </a:tr>
-            </a:tbl>
-          </a:graphicData>
-        </a:graphic>
-      </p:graphicFrame>
-      <p:graphicFrame>
-        <p:nvGraphicFramePr>
-          <p:cNvPr id="7" name="Tableau 6">
-            <a:extLst>
-              <a:ext uri="{FF2B5EF4-FFF2-40B4-BE49-F238E27FC236}">
-                <a16:creationId xmlns:a16="http://schemas.microsoft.com/office/drawing/2014/main" id="{70892891-7F5D-F2F3-345B-E0F52702AB06}"/>
-              </a:ext>
-            </a:extLst>
-          </p:cNvPr>
-          <p:cNvGraphicFramePr>
-            <a:graphicFrameLocks noGrp="1"/>
-          </p:cNvGraphicFramePr>
-          <p:nvPr>
-            <p:extLst>
-              <p:ext uri="{D42A27DB-BD31-4B8C-83A1-F6EECF244321}">
-                <p14:modId xmlns:p14="http://schemas.microsoft.com/office/powerpoint/2010/main" val="962946953"/>
-              </p:ext>
-            </p:extLst>
-          </p:nvPr>
-        </p:nvGraphicFramePr>
-        <p:xfrm>
-          <a:off x="838200" y="2697480"/>
-          <a:ext cx="7546848" cy="1463040"/>
-        </p:xfrm>
-        <a:graphic>
-          <a:graphicData uri="http://schemas.openxmlformats.org/drawingml/2006/table">
-            <a:tbl>
-              <a:tblPr/>
-              <a:tblGrid>
-                <a:gridCol w="1886712">
-                  <a:extLst>
-                    <a:ext uri="{9D8B030D-6E8A-4147-A177-3AD203B41FA5}">
-                      <a16:colId xmlns:a16="http://schemas.microsoft.com/office/drawing/2014/main" val="4176000407"/>
-                    </a:ext>
-                  </a:extLst>
-                </a:gridCol>
-                <a:gridCol w="1886712">
-                  <a:extLst>
-                    <a:ext uri="{9D8B030D-6E8A-4147-A177-3AD203B41FA5}">
-                      <a16:colId xmlns:a16="http://schemas.microsoft.com/office/drawing/2014/main" val="890025117"/>
-                    </a:ext>
-                  </a:extLst>
-                </a:gridCol>
-                <a:gridCol w="1886712">
-                  <a:extLst>
-                    <a:ext uri="{9D8B030D-6E8A-4147-A177-3AD203B41FA5}">
-                      <a16:colId xmlns:a16="http://schemas.microsoft.com/office/drawing/2014/main" val="2112727141"/>
-                    </a:ext>
-                  </a:extLst>
-                </a:gridCol>
-                <a:gridCol w="1886712">
-                  <a:extLst>
-                    <a:ext uri="{9D8B030D-6E8A-4147-A177-3AD203B41FA5}">
-                      <a16:colId xmlns:a16="http://schemas.microsoft.com/office/drawing/2014/main" val="3296924093"/>
-                    </a:ext>
-                  </a:extLst>
-                </a:gridCol>
-              </a:tblGrid>
-              <a:tr h="0">
-                <a:tc>
-                  <a:txBody>
-                    <a:bodyPr/>
-                    <a:lstStyle/>
-                    <a:p>
-                      <a:pPr>
-                        <a:buNone/>
-                      </a:pPr>
-                      <a:r>
-                        <a:rPr lang="fr-BE"/>
-                        <a:t>Taille fichier</a:t>
-                      </a:r>
-                    </a:p>
-                  </a:txBody>
-                  <a:tcPr anchor="ctr">
-                    <a:lnL>
-                      <a:noFill/>
-                    </a:lnL>
-                    <a:lnR>
-                      <a:noFill/>
-                    </a:lnR>
-                    <a:lnT>
-                      <a:noFill/>
-                    </a:lnT>
-                    <a:lnB>
-                      <a:noFill/>
-                    </a:lnB>
-                    <a:noFill/>
-                  </a:tcPr>
-                </a:tc>
-                <a:tc>
-                  <a:txBody>
-                    <a:bodyPr/>
-                    <a:lstStyle/>
-                    <a:p>
-                      <a:pPr>
-                        <a:buNone/>
-                      </a:pPr>
-                      <a:r>
-                        <a:rPr lang="fr-BE"/>
-                        <a:t>Temps</a:t>
-                      </a:r>
-                    </a:p>
-                  </a:txBody>
-                  <a:tcPr anchor="ctr">
-                    <a:lnL>
-                      <a:noFill/>
-                    </a:lnL>
-                    <a:lnR>
-                      <a:noFill/>
-                    </a:lnR>
-                    <a:lnT>
-                      <a:noFill/>
-                    </a:lnT>
-                    <a:lnB>
-                      <a:noFill/>
-                    </a:lnB>
-                    <a:noFill/>
-                  </a:tcPr>
-                </a:tc>
-                <a:tc>
-                  <a:txBody>
-                    <a:bodyPr/>
-                    <a:lstStyle/>
-                    <a:p>
-                      <a:pPr>
-                        <a:buNone/>
-                      </a:pPr>
-                      <a:r>
-                        <a:rPr lang="fr-BE"/>
-                        <a:t>Débit</a:t>
-                      </a:r>
-                    </a:p>
-                  </a:txBody>
-                  <a:tcPr anchor="ctr">
-                    <a:lnL>
-                      <a:noFill/>
-                    </a:lnL>
-                    <a:lnR>
-                      <a:noFill/>
-                    </a:lnR>
-                    <a:lnT>
-                      <a:noFill/>
-                    </a:lnT>
-                    <a:lnB>
-                      <a:noFill/>
-                    </a:lnB>
-                    <a:noFill/>
-                  </a:tcPr>
-                </a:tc>
-                <a:tc>
-                  <a:txBody>
-                    <a:bodyPr/>
-                    <a:lstStyle/>
-                    <a:p>
-                      <a:pPr>
-                        <a:buNone/>
-                      </a:pPr>
-                      <a:r>
-                        <a:rPr lang="fr-BE"/>
-                        <a:t>Retransmissions</a:t>
-                      </a:r>
-                    </a:p>
-                  </a:txBody>
-                  <a:tcPr anchor="ctr">
-                    <a:lnL>
-                      <a:noFill/>
-                    </a:lnL>
-                    <a:lnR>
-                      <a:noFill/>
-                    </a:lnR>
-                    <a:lnT>
-                      <a:noFill/>
-                    </a:lnT>
-                    <a:lnB>
-                      <a:noFill/>
-                    </a:lnB>
-                    <a:noFill/>
-                  </a:tcPr>
-                </a:tc>
-                <a:extLst>
-                  <a:ext uri="{0D108BD9-81ED-4DB2-BD59-A6C34878D82A}">
-                    <a16:rowId xmlns:a16="http://schemas.microsoft.com/office/drawing/2014/main" val="1181159754"/>
-                  </a:ext>
-                </a:extLst>
-              </a:tr>
-              <a:tr h="0">
-                <a:tc>
-                  <a:txBody>
-                    <a:bodyPr/>
-                    <a:lstStyle/>
-                    <a:p>
-                      <a:pPr>
-                        <a:buNone/>
-                      </a:pPr>
-                      <a:r>
-                        <a:rPr lang="fr-BE"/>
-                        <a:t>500 B</a:t>
-                      </a:r>
-                    </a:p>
-                  </a:txBody>
-                  <a:tcPr anchor="ctr">
-                    <a:lnL>
-                      <a:noFill/>
-                    </a:lnL>
-                    <a:lnR>
-                      <a:noFill/>
-                    </a:lnR>
-                    <a:lnT>
-                      <a:noFill/>
-                    </a:lnT>
-                    <a:lnB>
-                      <a:noFill/>
-                    </a:lnB>
-                    <a:noFill/>
-                  </a:tcPr>
-                </a:tc>
-                <a:tc>
-                  <a:txBody>
-                    <a:bodyPr/>
-                    <a:lstStyle/>
-                    <a:p>
-                      <a:pPr>
-                        <a:buNone/>
-                      </a:pPr>
-                      <a:r>
-                        <a:rPr lang="fr-BE" dirty="0"/>
-                        <a:t>9 ms</a:t>
-                      </a:r>
-                    </a:p>
-                  </a:txBody>
-                  <a:tcPr anchor="ctr">
-                    <a:lnL>
-                      <a:noFill/>
-                    </a:lnL>
-                    <a:lnR>
-                      <a:noFill/>
-                    </a:lnR>
-                    <a:lnT>
-                      <a:noFill/>
-                    </a:lnT>
-                    <a:lnB>
-                      <a:noFill/>
-                    </a:lnB>
-                    <a:noFill/>
-                  </a:tcPr>
-                </a:tc>
-                <a:tc>
-                  <a:txBody>
-                    <a:bodyPr/>
-                    <a:lstStyle/>
-                    <a:p>
-                      <a:pPr>
-                        <a:buNone/>
-                      </a:pPr>
-                      <a:r>
-                        <a:rPr lang="fr-BE" dirty="0"/>
-                        <a:t>58 KB/s</a:t>
-                      </a:r>
-                    </a:p>
-                  </a:txBody>
-                  <a:tcPr anchor="ctr">
-                    <a:lnL>
-                      <a:noFill/>
-                    </a:lnL>
-                    <a:lnR>
-                      <a:noFill/>
-                    </a:lnR>
-                    <a:lnT>
-                      <a:noFill/>
-                    </a:lnT>
-                    <a:lnB>
-                      <a:noFill/>
-                    </a:lnB>
-                    <a:noFill/>
-                  </a:tcPr>
-                </a:tc>
-                <a:tc>
-                  <a:txBody>
-                    <a:bodyPr/>
-                    <a:lstStyle/>
-                    <a:p>
-                      <a:pPr>
-                        <a:buNone/>
-                      </a:pPr>
-                      <a:r>
-                        <a:rPr lang="fr-BE"/>
-                        <a:t>2</a:t>
-                      </a:r>
-                    </a:p>
-                  </a:txBody>
-                  <a:tcPr anchor="ctr">
-                    <a:lnL>
-                      <a:noFill/>
-                    </a:lnL>
-                    <a:lnR>
-                      <a:noFill/>
-                    </a:lnR>
-                    <a:lnT>
-                      <a:noFill/>
-                    </a:lnT>
-                    <a:lnB>
-                      <a:noFill/>
-                    </a:lnB>
-                    <a:noFill/>
-                  </a:tcPr>
-                </a:tc>
-                <a:extLst>
-                  <a:ext uri="{0D108BD9-81ED-4DB2-BD59-A6C34878D82A}">
-                    <a16:rowId xmlns:a16="http://schemas.microsoft.com/office/drawing/2014/main" val="1915089580"/>
-                  </a:ext>
-                </a:extLst>
-              </a:tr>
-              <a:tr h="0">
-                <a:tc>
-                  <a:txBody>
-                    <a:bodyPr/>
-                    <a:lstStyle/>
-                    <a:p>
-                      <a:pPr>
-                        <a:buNone/>
-                      </a:pPr>
-                      <a:r>
-                        <a:rPr lang="fr-BE"/>
-                        <a:t>5 KB</a:t>
-                      </a:r>
-                    </a:p>
-                  </a:txBody>
-                  <a:tcPr anchor="ctr">
-                    <a:lnL>
-                      <a:noFill/>
-                    </a:lnL>
-                    <a:lnR>
-                      <a:noFill/>
-                    </a:lnR>
-                    <a:lnT>
-                      <a:noFill/>
-                    </a:lnT>
-                    <a:lnB>
-                      <a:noFill/>
-                    </a:lnB>
-                    <a:noFill/>
-                  </a:tcPr>
-                </a:tc>
-                <a:tc>
-                  <a:txBody>
-                    <a:bodyPr/>
-                    <a:lstStyle/>
-                    <a:p>
-                      <a:pPr>
-                        <a:buNone/>
-                      </a:pPr>
-                      <a:r>
-                        <a:rPr lang="fr-BE" dirty="0"/>
-                        <a:t>39 ms</a:t>
-                      </a:r>
-                    </a:p>
-                  </a:txBody>
-                  <a:tcPr anchor="ctr">
-                    <a:lnL>
-                      <a:noFill/>
-                    </a:lnL>
-                    <a:lnR>
-                      <a:noFill/>
-                    </a:lnR>
-                    <a:lnT>
-                      <a:noFill/>
-                    </a:lnT>
-                    <a:lnB>
-                      <a:noFill/>
-                    </a:lnB>
-                    <a:noFill/>
-                  </a:tcPr>
-                </a:tc>
-                <a:tc>
-                  <a:txBody>
-                    <a:bodyPr/>
-                    <a:lstStyle/>
-                    <a:p>
-                      <a:pPr>
-                        <a:buNone/>
-                      </a:pPr>
-                      <a:r>
-                        <a:rPr lang="fr-BE" dirty="0"/>
-                        <a:t>133 KB/s</a:t>
-                      </a:r>
-                    </a:p>
-                  </a:txBody>
-                  <a:tcPr anchor="ctr">
-                    <a:lnL>
-                      <a:noFill/>
-                    </a:lnL>
-                    <a:lnR>
-                      <a:noFill/>
-                    </a:lnR>
-                    <a:lnT>
-                      <a:noFill/>
-                    </a:lnT>
-                    <a:lnB>
-                      <a:noFill/>
-                    </a:lnB>
-                    <a:noFill/>
-                  </a:tcPr>
-                </a:tc>
-                <a:tc>
-                  <a:txBody>
-                    <a:bodyPr/>
-                    <a:lstStyle/>
-                    <a:p>
-                      <a:pPr>
-                        <a:buNone/>
-                      </a:pPr>
-                      <a:r>
-                        <a:rPr lang="fr-BE" dirty="0"/>
-                        <a:t>13</a:t>
-                      </a:r>
-                    </a:p>
-                  </a:txBody>
-                  <a:tcPr anchor="ctr">
-                    <a:lnL>
-                      <a:noFill/>
-                    </a:lnL>
-                    <a:lnR>
-                      <a:noFill/>
-                    </a:lnR>
-                    <a:lnT>
-                      <a:noFill/>
-                    </a:lnT>
-                    <a:lnB>
-                      <a:noFill/>
-                    </a:lnB>
-                    <a:noFill/>
-                  </a:tcPr>
-                </a:tc>
-                <a:extLst>
-                  <a:ext uri="{0D108BD9-81ED-4DB2-BD59-A6C34878D82A}">
-                    <a16:rowId xmlns:a16="http://schemas.microsoft.com/office/drawing/2014/main" val="3328699980"/>
-                  </a:ext>
-                </a:extLst>
-              </a:tr>
-              <a:tr h="0">
-                <a:tc>
-                  <a:txBody>
-                    <a:bodyPr/>
-                    <a:lstStyle/>
-                    <a:p>
-                      <a:pPr>
-                        <a:buNone/>
-                      </a:pPr>
-                      <a:r>
-                        <a:rPr lang="fr-BE"/>
-                        <a:t>50 KB</a:t>
-                      </a:r>
-                    </a:p>
-                  </a:txBody>
-                  <a:tcPr anchor="ctr">
-                    <a:lnL>
-                      <a:noFill/>
-                    </a:lnL>
-                    <a:lnR>
-                      <a:noFill/>
-                    </a:lnR>
-                    <a:lnT>
-                      <a:noFill/>
-                    </a:lnT>
-                    <a:lnB>
-                      <a:noFill/>
-                    </a:lnB>
-                    <a:noFill/>
-                  </a:tcPr>
-                </a:tc>
-                <a:tc>
-                  <a:txBody>
-                    <a:bodyPr/>
-                    <a:lstStyle/>
-                    <a:p>
-                      <a:pPr>
-                        <a:buNone/>
-                      </a:pPr>
-                      <a:r>
-                        <a:rPr lang="fr-BE" dirty="0"/>
-                        <a:t>211 ms</a:t>
-                      </a:r>
-                    </a:p>
-                  </a:txBody>
-                  <a:tcPr anchor="ctr">
-                    <a:lnL>
-                      <a:noFill/>
-                    </a:lnL>
-                    <a:lnR>
-                      <a:noFill/>
-                    </a:lnR>
-                    <a:lnT>
-                      <a:noFill/>
-                    </a:lnT>
-                    <a:lnB>
-                      <a:noFill/>
-                    </a:lnB>
-                    <a:noFill/>
-                  </a:tcPr>
-                </a:tc>
-                <a:tc>
-                  <a:txBody>
-                    <a:bodyPr/>
-                    <a:lstStyle/>
-                    <a:p>
-                      <a:pPr>
-                        <a:buNone/>
-                      </a:pPr>
-                      <a:r>
-                        <a:rPr lang="fr-BE" dirty="0"/>
-                        <a:t>230 KB/s</a:t>
-                      </a:r>
-                    </a:p>
-                  </a:txBody>
-                  <a:tcPr anchor="ctr">
-                    <a:lnL>
-                      <a:noFill/>
-                    </a:lnL>
-                    <a:lnR>
-                      <a:noFill/>
-                    </a:lnR>
-                    <a:lnT>
-                      <a:noFill/>
-                    </a:lnT>
-                    <a:lnB>
-                      <a:noFill/>
-                    </a:lnB>
-                    <a:noFill/>
-                  </a:tcPr>
-                </a:tc>
-                <a:tc>
-                  <a:txBody>
-                    <a:bodyPr/>
-                    <a:lstStyle/>
-                    <a:p>
-                      <a:pPr>
-                        <a:buNone/>
-                      </a:pPr>
-                      <a:r>
-                        <a:rPr lang="fr-BE" dirty="0"/>
-                        <a:t>41</a:t>
-                      </a:r>
-                    </a:p>
-                  </a:txBody>
-                  <a:tcPr anchor="ctr">
-                    <a:lnL>
-                      <a:noFill/>
-                    </a:lnL>
-                    <a:lnR>
-                      <a:noFill/>
-                    </a:lnR>
-                    <a:lnT>
-                      <a:noFill/>
-                    </a:lnT>
-                    <a:lnB>
-                      <a:noFill/>
-                    </a:lnB>
-                    <a:noFill/>
-                  </a:tcPr>
-                </a:tc>
-                <a:extLst>
-                  <a:ext uri="{0D108BD9-81ED-4DB2-BD59-A6C34878D82A}">
-                    <a16:rowId xmlns:a16="http://schemas.microsoft.com/office/drawing/2014/main" val="2066704408"/>
-                  </a:ext>
-                </a:extLst>
-              </a:tr>
-            </a:tbl>
-          </a:graphicData>
-        </a:graphic>
-      </p:graphicFrame>
-      <p:sp>
-        <p:nvSpPr>
-          <p:cNvPr id="8" name="ZoneTexte 7">
-            <a:extLst>
-              <a:ext uri="{FF2B5EF4-FFF2-40B4-BE49-F238E27FC236}">
-                <a16:creationId xmlns:a16="http://schemas.microsoft.com/office/drawing/2014/main" id="{C47A4C76-4017-5CF2-508A-51FBD5C3D5D1}"/>
-              </a:ext>
-            </a:extLst>
-          </p:cNvPr>
-          <p:cNvSpPr txBox="1"/>
-          <p:nvPr/>
-        </p:nvSpPr>
-        <p:spPr>
-          <a:xfrm>
-            <a:off x="838200" y="2216436"/>
-            <a:ext cx="2057400" cy="369332"/>
+            <a:off x="643467" y="2106083"/>
+            <a:ext cx="5291666" cy="2645833"/>
           </a:xfrm>
           <a:prstGeom prst="rect">
             <a:avLst/>
           </a:prstGeom>
-          <a:noFill/>
         </p:spPr>
-        <p:txBody>
-          <a:bodyPr wrap="square" rtlCol="0">
-            <a:spAutoFit/>
-          </a:bodyPr>
-          <a:lstStyle/>
-          <a:p>
-            <a:r>
-              <a:rPr lang="fr-BE" b="1" dirty="0"/>
-              <a:t>Pertes (5%)</a:t>
-            </a:r>
-          </a:p>
-        </p:txBody>
-      </p:sp>
-      <p:sp>
-        <p:nvSpPr>
-          <p:cNvPr id="9" name="ZoneTexte 8">
-            <a:extLst>
-              <a:ext uri="{FF2B5EF4-FFF2-40B4-BE49-F238E27FC236}">
-                <a16:creationId xmlns:a16="http://schemas.microsoft.com/office/drawing/2014/main" id="{8972BCAB-C111-396D-7FB5-4FBA2FE8765A}"/>
-              </a:ext>
-            </a:extLst>
-          </p:cNvPr>
-          <p:cNvSpPr txBox="1"/>
+      </p:pic>
+      <p:pic>
+        <p:nvPicPr>
+          <p:cNvPr id="16" name="Content Placeholder 15">
+            <a:extLst>
+              <a:ext uri="{FF2B5EF4-FFF2-40B4-BE49-F238E27FC236}">
+                <a16:creationId xmlns:a16="http://schemas.microsoft.com/office/drawing/2014/main" id="{02387920-2DD5-1701-504C-B8EABD92455C}"/>
+              </a:ext>
+            </a:extLst>
+          </p:cNvPr>
+          <p:cNvPicPr>
+            <a:picLocks noChangeAspect="1"/>
+          </p:cNvPicPr>
           <p:nvPr/>
-        </p:nvSpPr>
+        </p:nvPicPr>
+        <p:blipFill>
+          <a:blip r:embed="rId3"/>
+          <a:stretch>
+            <a:fillRect/>
+          </a:stretch>
+        </p:blipFill>
         <p:spPr>
           <a:xfrm>
-            <a:off x="838200" y="91440"/>
-            <a:ext cx="2532888" cy="369332"/>
+            <a:off x="6587594" y="2106083"/>
+            <a:ext cx="4630209" cy="2645834"/>
           </a:xfrm>
           <a:prstGeom prst="rect">
             <a:avLst/>
           </a:prstGeom>
-          <a:noFill/>
         </p:spPr>
-        <p:txBody>
-          <a:bodyPr wrap="square" rtlCol="0">
-            <a:spAutoFit/>
-          </a:bodyPr>
-          <a:lstStyle/>
-          <a:p>
-            <a:r>
-              <a:rPr lang="fr-BE" b="1" dirty="0"/>
-              <a:t>Réseau parfait</a:t>
-            </a:r>
-          </a:p>
-        </p:txBody>
-      </p:sp>
-      <p:graphicFrame>
-        <p:nvGraphicFramePr>
-          <p:cNvPr id="11" name="Tableau 10">
-            <a:extLst>
-              <a:ext uri="{FF2B5EF4-FFF2-40B4-BE49-F238E27FC236}">
-                <a16:creationId xmlns:a16="http://schemas.microsoft.com/office/drawing/2014/main" id="{E23F853A-1A2F-1761-A6CC-1AD191FF70EF}"/>
-              </a:ext>
-            </a:extLst>
-          </p:cNvPr>
-          <p:cNvGraphicFramePr>
-            <a:graphicFrameLocks noGrp="1"/>
-          </p:cNvGraphicFramePr>
-          <p:nvPr>
-            <p:extLst>
-              <p:ext uri="{D42A27DB-BD31-4B8C-83A1-F6EECF244321}">
-                <p14:modId xmlns:p14="http://schemas.microsoft.com/office/powerpoint/2010/main" val="3522110954"/>
-              </p:ext>
-            </p:extLst>
-          </p:nvPr>
-        </p:nvGraphicFramePr>
-        <p:xfrm>
-          <a:off x="838200" y="4833596"/>
-          <a:ext cx="7830312" cy="1463040"/>
-        </p:xfrm>
-        <a:graphic>
-          <a:graphicData uri="http://schemas.openxmlformats.org/drawingml/2006/table">
-            <a:tbl>
-              <a:tblPr/>
-              <a:tblGrid>
-                <a:gridCol w="1957578">
-                  <a:extLst>
-                    <a:ext uri="{9D8B030D-6E8A-4147-A177-3AD203B41FA5}">
-                      <a16:colId xmlns:a16="http://schemas.microsoft.com/office/drawing/2014/main" val="1366090509"/>
-                    </a:ext>
-                  </a:extLst>
-                </a:gridCol>
-                <a:gridCol w="1957578">
-                  <a:extLst>
-                    <a:ext uri="{9D8B030D-6E8A-4147-A177-3AD203B41FA5}">
-                      <a16:colId xmlns:a16="http://schemas.microsoft.com/office/drawing/2014/main" val="2545641747"/>
-                    </a:ext>
-                  </a:extLst>
-                </a:gridCol>
-                <a:gridCol w="1957578">
-                  <a:extLst>
-                    <a:ext uri="{9D8B030D-6E8A-4147-A177-3AD203B41FA5}">
-                      <a16:colId xmlns:a16="http://schemas.microsoft.com/office/drawing/2014/main" val="2372894590"/>
-                    </a:ext>
-                  </a:extLst>
-                </a:gridCol>
-                <a:gridCol w="1957578">
-                  <a:extLst>
-                    <a:ext uri="{9D8B030D-6E8A-4147-A177-3AD203B41FA5}">
-                      <a16:colId xmlns:a16="http://schemas.microsoft.com/office/drawing/2014/main" val="540934929"/>
-                    </a:ext>
-                  </a:extLst>
-                </a:gridCol>
-              </a:tblGrid>
-              <a:tr h="0">
-                <a:tc>
-                  <a:txBody>
-                    <a:bodyPr/>
-                    <a:lstStyle/>
-                    <a:p>
-                      <a:pPr>
-                        <a:buNone/>
-                      </a:pPr>
-                      <a:r>
-                        <a:rPr lang="fr-BE"/>
-                        <a:t>Taille fichier</a:t>
-                      </a:r>
-                    </a:p>
-                  </a:txBody>
-                  <a:tcPr anchor="ctr">
-                    <a:lnL>
-                      <a:noFill/>
-                    </a:lnL>
-                    <a:lnR>
-                      <a:noFill/>
-                    </a:lnR>
-                    <a:lnT>
-                      <a:noFill/>
-                    </a:lnT>
-                    <a:lnB>
-                      <a:noFill/>
-                    </a:lnB>
-                    <a:noFill/>
-                  </a:tcPr>
-                </a:tc>
-                <a:tc>
-                  <a:txBody>
-                    <a:bodyPr/>
-                    <a:lstStyle/>
-                    <a:p>
-                      <a:pPr>
-                        <a:buNone/>
-                      </a:pPr>
-                      <a:r>
-                        <a:rPr lang="fr-BE"/>
-                        <a:t>Temps</a:t>
-                      </a:r>
-                    </a:p>
-                  </a:txBody>
-                  <a:tcPr anchor="ctr">
-                    <a:lnL>
-                      <a:noFill/>
-                    </a:lnL>
-                    <a:lnR>
-                      <a:noFill/>
-                    </a:lnR>
-                    <a:lnT>
-                      <a:noFill/>
-                    </a:lnT>
-                    <a:lnB>
-                      <a:noFill/>
-                    </a:lnB>
-                    <a:noFill/>
-                  </a:tcPr>
-                </a:tc>
-                <a:tc>
-                  <a:txBody>
-                    <a:bodyPr/>
-                    <a:lstStyle/>
-                    <a:p>
-                      <a:pPr>
-                        <a:buNone/>
-                      </a:pPr>
-                      <a:r>
-                        <a:rPr lang="fr-BE"/>
-                        <a:t>Débit</a:t>
-                      </a:r>
-                    </a:p>
-                  </a:txBody>
-                  <a:tcPr anchor="ctr">
-                    <a:lnL>
-                      <a:noFill/>
-                    </a:lnL>
-                    <a:lnR>
-                      <a:noFill/>
-                    </a:lnR>
-                    <a:lnT>
-                      <a:noFill/>
-                    </a:lnT>
-                    <a:lnB>
-                      <a:noFill/>
-                    </a:lnB>
-                    <a:noFill/>
-                  </a:tcPr>
-                </a:tc>
-                <a:tc>
-                  <a:txBody>
-                    <a:bodyPr/>
-                    <a:lstStyle/>
-                    <a:p>
-                      <a:pPr>
-                        <a:buNone/>
-                      </a:pPr>
-                      <a:r>
-                        <a:rPr lang="fr-BE"/>
-                        <a:t>Retransmissions</a:t>
-                      </a:r>
-                    </a:p>
-                  </a:txBody>
-                  <a:tcPr anchor="ctr">
-                    <a:lnL>
-                      <a:noFill/>
-                    </a:lnL>
-                    <a:lnR>
-                      <a:noFill/>
-                    </a:lnR>
-                    <a:lnT>
-                      <a:noFill/>
-                    </a:lnT>
-                    <a:lnB>
-                      <a:noFill/>
-                    </a:lnB>
-                    <a:noFill/>
-                  </a:tcPr>
-                </a:tc>
-                <a:extLst>
-                  <a:ext uri="{0D108BD9-81ED-4DB2-BD59-A6C34878D82A}">
-                    <a16:rowId xmlns:a16="http://schemas.microsoft.com/office/drawing/2014/main" val="2689981673"/>
-                  </a:ext>
-                </a:extLst>
-              </a:tr>
-              <a:tr h="0">
-                <a:tc>
-                  <a:txBody>
-                    <a:bodyPr/>
-                    <a:lstStyle/>
-                    <a:p>
-                      <a:pPr>
-                        <a:buNone/>
-                      </a:pPr>
-                      <a:r>
-                        <a:rPr lang="fr-BE"/>
-                        <a:t>500 B</a:t>
-                      </a:r>
-                    </a:p>
-                  </a:txBody>
-                  <a:tcPr anchor="ctr">
-                    <a:lnL>
-                      <a:noFill/>
-                    </a:lnL>
-                    <a:lnR>
-                      <a:noFill/>
-                    </a:lnR>
-                    <a:lnT>
-                      <a:noFill/>
-                    </a:lnT>
-                    <a:lnB>
-                      <a:noFill/>
-                    </a:lnB>
-                    <a:noFill/>
-                  </a:tcPr>
-                </a:tc>
-                <a:tc>
-                  <a:txBody>
-                    <a:bodyPr/>
-                    <a:lstStyle/>
-                    <a:p>
-                      <a:pPr>
-                        <a:buNone/>
-                      </a:pPr>
-                      <a:r>
-                        <a:rPr lang="fr-BE" dirty="0"/>
-                        <a:t>14 ms</a:t>
-                      </a:r>
-                    </a:p>
-                  </a:txBody>
-                  <a:tcPr anchor="ctr">
-                    <a:lnL>
-                      <a:noFill/>
-                    </a:lnL>
-                    <a:lnR>
-                      <a:noFill/>
-                    </a:lnR>
-                    <a:lnT>
-                      <a:noFill/>
-                    </a:lnT>
-                    <a:lnB>
-                      <a:noFill/>
-                    </a:lnB>
-                    <a:noFill/>
-                  </a:tcPr>
-                </a:tc>
-                <a:tc>
-                  <a:txBody>
-                    <a:bodyPr/>
-                    <a:lstStyle/>
-                    <a:p>
-                      <a:pPr>
-                        <a:buNone/>
-                      </a:pPr>
-                      <a:r>
-                        <a:rPr lang="fr-BE" dirty="0"/>
-                        <a:t>46 KB/s</a:t>
-                      </a:r>
-                    </a:p>
-                  </a:txBody>
-                  <a:tcPr anchor="ctr">
-                    <a:lnL>
-                      <a:noFill/>
-                    </a:lnL>
-                    <a:lnR>
-                      <a:noFill/>
-                    </a:lnR>
-                    <a:lnT>
-                      <a:noFill/>
-                    </a:lnT>
-                    <a:lnB>
-                      <a:noFill/>
-                    </a:lnB>
-                    <a:noFill/>
-                  </a:tcPr>
-                </a:tc>
-                <a:tc>
-                  <a:txBody>
-                    <a:bodyPr/>
-                    <a:lstStyle/>
-                    <a:p>
-                      <a:pPr>
-                        <a:buNone/>
-                      </a:pPr>
-                      <a:r>
-                        <a:rPr lang="fr-BE" dirty="0"/>
-                        <a:t>4</a:t>
-                      </a:r>
-                    </a:p>
-                  </a:txBody>
-                  <a:tcPr anchor="ctr">
-                    <a:lnL>
-                      <a:noFill/>
-                    </a:lnL>
-                    <a:lnR>
-                      <a:noFill/>
-                    </a:lnR>
-                    <a:lnT>
-                      <a:noFill/>
-                    </a:lnT>
-                    <a:lnB>
-                      <a:noFill/>
-                    </a:lnB>
-                    <a:noFill/>
-                  </a:tcPr>
-                </a:tc>
-                <a:extLst>
-                  <a:ext uri="{0D108BD9-81ED-4DB2-BD59-A6C34878D82A}">
-                    <a16:rowId xmlns:a16="http://schemas.microsoft.com/office/drawing/2014/main" val="185995019"/>
-                  </a:ext>
-                </a:extLst>
-              </a:tr>
-              <a:tr h="0">
-                <a:tc>
-                  <a:txBody>
-                    <a:bodyPr/>
-                    <a:lstStyle/>
-                    <a:p>
-                      <a:pPr>
-                        <a:buNone/>
-                      </a:pPr>
-                      <a:r>
-                        <a:rPr lang="fr-BE"/>
-                        <a:t>5 KB</a:t>
-                      </a:r>
-                    </a:p>
-                  </a:txBody>
-                  <a:tcPr anchor="ctr">
-                    <a:lnL>
-                      <a:noFill/>
-                    </a:lnL>
-                    <a:lnR>
-                      <a:noFill/>
-                    </a:lnR>
-                    <a:lnT>
-                      <a:noFill/>
-                    </a:lnT>
-                    <a:lnB>
-                      <a:noFill/>
-                    </a:lnB>
-                    <a:noFill/>
-                  </a:tcPr>
-                </a:tc>
-                <a:tc>
-                  <a:txBody>
-                    <a:bodyPr/>
-                    <a:lstStyle/>
-                    <a:p>
-                      <a:pPr>
-                        <a:buNone/>
-                      </a:pPr>
-                      <a:r>
-                        <a:rPr lang="fr-BE" dirty="0"/>
-                        <a:t>67 ms</a:t>
-                      </a:r>
-                    </a:p>
-                  </a:txBody>
-                  <a:tcPr anchor="ctr">
-                    <a:lnL>
-                      <a:noFill/>
-                    </a:lnL>
-                    <a:lnR>
-                      <a:noFill/>
-                    </a:lnR>
-                    <a:lnT>
-                      <a:noFill/>
-                    </a:lnT>
-                    <a:lnB>
-                      <a:noFill/>
-                    </a:lnB>
-                    <a:noFill/>
-                  </a:tcPr>
-                </a:tc>
-                <a:tc>
-                  <a:txBody>
-                    <a:bodyPr/>
-                    <a:lstStyle/>
-                    <a:p>
-                      <a:pPr>
-                        <a:buNone/>
-                      </a:pPr>
-                      <a:r>
-                        <a:rPr lang="fr-BE" dirty="0"/>
-                        <a:t>94 KB/s</a:t>
-                      </a:r>
-                    </a:p>
-                  </a:txBody>
-                  <a:tcPr anchor="ctr">
-                    <a:lnL>
-                      <a:noFill/>
-                    </a:lnL>
-                    <a:lnR>
-                      <a:noFill/>
-                    </a:lnR>
-                    <a:lnT>
-                      <a:noFill/>
-                    </a:lnT>
-                    <a:lnB>
-                      <a:noFill/>
-                    </a:lnB>
-                    <a:noFill/>
-                  </a:tcPr>
-                </a:tc>
-                <a:tc>
-                  <a:txBody>
-                    <a:bodyPr/>
-                    <a:lstStyle/>
-                    <a:p>
-                      <a:pPr>
-                        <a:buNone/>
-                      </a:pPr>
-                      <a:r>
-                        <a:rPr lang="fr-BE" dirty="0"/>
-                        <a:t>23</a:t>
-                      </a:r>
-                    </a:p>
-                  </a:txBody>
-                  <a:tcPr anchor="ctr">
-                    <a:lnL>
-                      <a:noFill/>
-                    </a:lnL>
-                    <a:lnR>
-                      <a:noFill/>
-                    </a:lnR>
-                    <a:lnT>
-                      <a:noFill/>
-                    </a:lnT>
-                    <a:lnB>
-                      <a:noFill/>
-                    </a:lnB>
-                    <a:noFill/>
-                  </a:tcPr>
-                </a:tc>
-                <a:extLst>
-                  <a:ext uri="{0D108BD9-81ED-4DB2-BD59-A6C34878D82A}">
-                    <a16:rowId xmlns:a16="http://schemas.microsoft.com/office/drawing/2014/main" val="2816722628"/>
-                  </a:ext>
-                </a:extLst>
-              </a:tr>
-              <a:tr h="0">
-                <a:tc>
-                  <a:txBody>
-                    <a:bodyPr/>
-                    <a:lstStyle/>
-                    <a:p>
-                      <a:pPr>
-                        <a:buNone/>
-                      </a:pPr>
-                      <a:r>
-                        <a:rPr lang="fr-BE"/>
-                        <a:t>50 KB</a:t>
-                      </a:r>
-                    </a:p>
-                  </a:txBody>
-                  <a:tcPr anchor="ctr">
-                    <a:lnL>
-                      <a:noFill/>
-                    </a:lnL>
-                    <a:lnR>
-                      <a:noFill/>
-                    </a:lnR>
-                    <a:lnT>
-                      <a:noFill/>
-                    </a:lnT>
-                    <a:lnB>
-                      <a:noFill/>
-                    </a:lnB>
-                    <a:noFill/>
-                  </a:tcPr>
-                </a:tc>
-                <a:tc>
-                  <a:txBody>
-                    <a:bodyPr/>
-                    <a:lstStyle/>
-                    <a:p>
-                      <a:pPr>
-                        <a:buNone/>
-                      </a:pPr>
-                      <a:r>
-                        <a:rPr lang="fr-BE" dirty="0"/>
-                        <a:t>442 ms</a:t>
-                      </a:r>
-                    </a:p>
-                  </a:txBody>
-                  <a:tcPr anchor="ctr">
-                    <a:lnL>
-                      <a:noFill/>
-                    </a:lnL>
-                    <a:lnR>
-                      <a:noFill/>
-                    </a:lnR>
-                    <a:lnT>
-                      <a:noFill/>
-                    </a:lnT>
-                    <a:lnB>
-                      <a:noFill/>
-                    </a:lnB>
-                    <a:noFill/>
-                  </a:tcPr>
-                </a:tc>
-                <a:tc>
-                  <a:txBody>
-                    <a:bodyPr/>
-                    <a:lstStyle/>
-                    <a:p>
-                      <a:pPr>
-                        <a:buNone/>
-                      </a:pPr>
-                      <a:r>
-                        <a:rPr lang="fr-BE" dirty="0"/>
-                        <a:t>141 KB/s</a:t>
-                      </a:r>
-                    </a:p>
-                  </a:txBody>
-                  <a:tcPr anchor="ctr">
-                    <a:lnL>
-                      <a:noFill/>
-                    </a:lnL>
-                    <a:lnR>
-                      <a:noFill/>
-                    </a:lnR>
-                    <a:lnT>
-                      <a:noFill/>
-                    </a:lnT>
-                    <a:lnB>
-                      <a:noFill/>
-                    </a:lnB>
-                    <a:noFill/>
-                  </a:tcPr>
-                </a:tc>
-                <a:tc>
-                  <a:txBody>
-                    <a:bodyPr/>
-                    <a:lstStyle/>
-                    <a:p>
-                      <a:pPr>
-                        <a:buNone/>
-                      </a:pPr>
-                      <a:r>
-                        <a:rPr lang="fr-BE" dirty="0"/>
-                        <a:t>99</a:t>
-                      </a:r>
-                    </a:p>
-                  </a:txBody>
-                  <a:tcPr anchor="ctr">
-                    <a:lnL>
-                      <a:noFill/>
-                    </a:lnL>
-                    <a:lnR>
-                      <a:noFill/>
-                    </a:lnR>
-                    <a:lnT>
-                      <a:noFill/>
-                    </a:lnT>
-                    <a:lnB>
-                      <a:noFill/>
-                    </a:lnB>
-                    <a:noFill/>
-                  </a:tcPr>
-                </a:tc>
-                <a:extLst>
-                  <a:ext uri="{0D108BD9-81ED-4DB2-BD59-A6C34878D82A}">
-                    <a16:rowId xmlns:a16="http://schemas.microsoft.com/office/drawing/2014/main" val="3324136742"/>
-                  </a:ext>
-                </a:extLst>
-              </a:tr>
-            </a:tbl>
-          </a:graphicData>
-        </a:graphic>
-      </p:graphicFrame>
-      <p:sp>
-        <p:nvSpPr>
-          <p:cNvPr id="12" name="ZoneTexte 11">
-            <a:extLst>
-              <a:ext uri="{FF2B5EF4-FFF2-40B4-BE49-F238E27FC236}">
-                <a16:creationId xmlns:a16="http://schemas.microsoft.com/office/drawing/2014/main" id="{23E9FAAC-2008-81F4-280D-FD0B2A9844EC}"/>
-              </a:ext>
-            </a:extLst>
-          </p:cNvPr>
-          <p:cNvSpPr txBox="1"/>
-          <p:nvPr/>
+      </p:pic>
+      <p:sp>
+        <p:nvSpPr>
+          <p:cNvPr id="13" name="Espace réservé du numéro de diapositive 12">
+            <a:extLst>
+              <a:ext uri="{FF2B5EF4-FFF2-40B4-BE49-F238E27FC236}">
+                <a16:creationId xmlns:a16="http://schemas.microsoft.com/office/drawing/2014/main" id="{1DA15EBB-DA5D-6E92-320F-C1FDE0560A4C}"/>
+              </a:ext>
+            </a:extLst>
+          </p:cNvPr>
+          <p:cNvSpPr>
+            <a:spLocks noGrp="1"/>
+          </p:cNvSpPr>
+          <p:nvPr>
+            <p:ph type="sldNum" sz="quarter" idx="12"/>
+          </p:nvPr>
         </p:nvSpPr>
         <p:spPr>
           <a:xfrm>
-            <a:off x="838200" y="4363672"/>
-            <a:ext cx="1499616" cy="369332"/>
+            <a:off x="8610600" y="6356350"/>
+            <a:ext cx="2743200" cy="365125"/>
           </a:xfrm>
-          <a:prstGeom prst="rect">
-            <a:avLst/>
-          </a:prstGeom>
-          <a:noFill/>
         </p:spPr>
         <p:txBody>
-          <a:bodyPr wrap="square" rtlCol="0">
-            <a:spAutoFit/>
+          <a:bodyPr vert="horz" lIns="91440" tIns="45720" rIns="91440" bIns="45720" rtlCol="0" anchor="ctr">
+            <a:normAutofit/>
           </a:bodyPr>
           <a:lstStyle/>
           <a:p>
-            <a:r>
-              <a:rPr lang="fr-BE" b="1" dirty="0"/>
-              <a:t>Pertes (10%)</a:t>
-            </a:r>
-          </a:p>
-        </p:txBody>
-      </p:sp>
-      <p:sp>
-        <p:nvSpPr>
-          <p:cNvPr id="13" name="Espace réservé du numéro de diapositive 12">
-            <a:extLst>
-              <a:ext uri="{FF2B5EF4-FFF2-40B4-BE49-F238E27FC236}">
-                <a16:creationId xmlns:a16="http://schemas.microsoft.com/office/drawing/2014/main" id="{1DA15EBB-DA5D-6E92-320F-C1FDE0560A4C}"/>
-              </a:ext>
-            </a:extLst>
-          </p:cNvPr>
-          <p:cNvSpPr>
-            <a:spLocks noGrp="1"/>
-          </p:cNvSpPr>
-          <p:nvPr>
-            <p:ph type="sldNum" sz="quarter" idx="12"/>
-          </p:nvPr>
-        </p:nvSpPr>
-        <p:spPr/>
-        <p:txBody>
-          <a:bodyPr/>
-          <a:lstStyle/>
-          <a:p>
+            <a:pPr>
+              <a:spcAft>
+                <a:spcPts val="600"/>
+              </a:spcAft>
+            </a:pPr>
             <a:fld id="{6D78B8F9-767A-4546-9D20-2187B79FBE53}" type="slidenum">
-              <a:rPr lang="fr-BE" smtClean="0"/>
+              <a:rPr lang="en-US">
+                <a:solidFill>
+                  <a:schemeClr val="tx1">
+                    <a:tint val="75000"/>
+                  </a:schemeClr>
+                </a:solidFill>
+              </a:rPr>
+              <a:pPr>
+                <a:spcAft>
+                  <a:spcPts val="600"/>
+                </a:spcAft>
+              </a:pPr>
               <a:t>8</a:t>
             </a:fld>
-            <a:endParaRPr lang="fr-BE"/>
+            <a:endParaRPr lang="en-US">
+              <a:solidFill>
+                <a:schemeClr val="tx1">
+                  <a:tint val="75000"/>
+                </a:schemeClr>
+              </a:solidFill>
+            </a:endParaRPr>
+          </a:p>
+        </p:txBody>
+      </p:sp>
+      <p:sp>
+        <p:nvSpPr>
+          <p:cNvPr id="5" name="Titre 1">
+            <a:extLst>
+              <a:ext uri="{FF2B5EF4-FFF2-40B4-BE49-F238E27FC236}">
+                <a16:creationId xmlns:a16="http://schemas.microsoft.com/office/drawing/2014/main" id="{0B01ED6C-4183-0ADD-30F4-1243706970EE}"/>
+              </a:ext>
+            </a:extLst>
+          </p:cNvPr>
+          <p:cNvSpPr>
+            <a:spLocks noGrp="1"/>
+          </p:cNvSpPr>
+          <p:nvPr>
+            <p:ph type="title"/>
+          </p:nvPr>
+        </p:nvSpPr>
+        <p:spPr>
+          <a:xfrm>
+            <a:off x="838200" y="365125"/>
+            <a:ext cx="10515600" cy="1325563"/>
+          </a:xfrm>
+        </p:spPr>
+        <p:txBody>
+          <a:bodyPr/>
+          <a:lstStyle/>
+          <a:p>
+            <a:r>
+              <a:rPr lang="fr-BE"/>
+              <a:t>Graphiques de performances</a:t>
+            </a:r>
+            <a:endParaRPr lang="fr-BE" dirty="0"/>
           </a:p>
         </p:txBody>
       </p:sp>
@@ -6819,7 +5078,7 @@
         </p:nvSpPr>
         <p:spPr/>
         <p:txBody>
-          <a:bodyPr>
+          <a:bodyPr vert="horz" lIns="91440" tIns="45720" rIns="91440" bIns="45720" rtlCol="0" anchor="t">
             <a:normAutofit/>
           </a:bodyPr>
           <a:lstStyle/>
@@ -6880,7 +5139,15 @@
             </a:r>
             <a:r>
               <a:rPr lang="fr-FR" dirty="0"/>
-              <a:t>pertes, corruption, multi-clients </a:t>
+              <a:t>pertes, corruption, </a:t>
+            </a:r>
+            <a:r>
+              <a:rPr lang="fr-FR" dirty="0" err="1"/>
+              <a:t>dedoublement</a:t>
+            </a:r>
+            <a:r>
+              <a:rPr lang="fr-FR" dirty="0"/>
+              <a:t>, multi-clients </a:t>
             </a:r>
           </a:p>
           <a:p>

--- a/Rapport_projet_SRTP.pptx
+++ b/Rapport_projet_SRTP.pptx
@@ -5,7 +5,7 @@
     <p:sldMasterId id="2147483648" r:id="rId1"/>
   </p:sldMasterIdLst>
   <p:notesMasterIdLst>
-    <p:notesMasterId r:id="rId12"/>
+    <p:notesMasterId r:id="rId17"/>
   </p:notesMasterIdLst>
   <p:sldIdLst>
     <p:sldId id="256" r:id="rId2"/>
@@ -18,6 +18,11 @@
     <p:sldId id="267" r:id="rId9"/>
     <p:sldId id="264" r:id="rId10"/>
     <p:sldId id="266" r:id="rId11"/>
+    <p:sldId id="268" r:id="rId12"/>
+    <p:sldId id="269" r:id="rId13"/>
+    <p:sldId id="270" r:id="rId14"/>
+    <p:sldId id="271" r:id="rId15"/>
+    <p:sldId id="272" r:id="rId16"/>
   </p:sldIdLst>
   <p:sldSz cx="12192000" cy="6858000"/>
   <p:notesSz cx="6858000" cy="9144000"/>
@@ -214,7 +219,7 @@
           <a:p>
             <a:fld id="{42CCBD27-2017-4083-8306-4AF4201DE26C}" type="datetimeFigureOut">
               <a:rPr lang="fr-BE" smtClean="0"/>
-              <a:t>23-03-26</a:t>
+              <a:t>29-03-26</a:t>
             </a:fld>
             <a:endParaRPr lang="fr-BE"/>
           </a:p>
@@ -373,7 +378,7 @@
           <a:p>
             <a:fld id="{64EBDF11-E6C0-49D4-AA9D-12CE67B77172}" type="slidenum">
               <a:rPr lang="fr-BE" smtClean="0"/>
-              <a:t>‹#›</a:t>
+              <a:t>‹N°›</a:t>
             </a:fld>
             <a:endParaRPr lang="fr-BE"/>
           </a:p>
@@ -631,7 +636,7 @@
           <a:p>
             <a:fld id="{0EEF7359-6F4B-4DDE-B4B4-FCA63065D932}" type="datetime1">
               <a:rPr lang="fr-BE" smtClean="0"/>
-              <a:t>23-03-26</a:t>
+              <a:t>29-03-26</a:t>
             </a:fld>
             <a:endParaRPr lang="fr-BE"/>
           </a:p>
@@ -685,7 +690,7 @@
           <a:p>
             <a:fld id="{6D78B8F9-767A-4546-9D20-2187B79FBE53}" type="slidenum">
               <a:rPr lang="fr-BE" smtClean="0"/>
-              <a:t>‹#›</a:t>
+              <a:t>‹N°›</a:t>
             </a:fld>
             <a:endParaRPr lang="fr-BE"/>
           </a:p>
@@ -831,7 +836,7 @@
           <a:p>
             <a:fld id="{23BE8029-426D-497D-80B4-D4AD16055BC9}" type="datetime1">
               <a:rPr lang="fr-BE" smtClean="0"/>
-              <a:t>23-03-26</a:t>
+              <a:t>29-03-26</a:t>
             </a:fld>
             <a:endParaRPr lang="fr-BE"/>
           </a:p>
@@ -885,7 +890,7 @@
           <a:p>
             <a:fld id="{6D78B8F9-767A-4546-9D20-2187B79FBE53}" type="slidenum">
               <a:rPr lang="fr-BE" smtClean="0"/>
-              <a:t>‹#›</a:t>
+              <a:t>‹N°›</a:t>
             </a:fld>
             <a:endParaRPr lang="fr-BE"/>
           </a:p>
@@ -1041,7 +1046,7 @@
           <a:p>
             <a:fld id="{66978CD1-4B56-4F0B-B848-FE19E6C0C64E}" type="datetime1">
               <a:rPr lang="fr-BE" smtClean="0"/>
-              <a:t>23-03-26</a:t>
+              <a:t>29-03-26</a:t>
             </a:fld>
             <a:endParaRPr lang="fr-BE"/>
           </a:p>
@@ -1095,7 +1100,7 @@
           <a:p>
             <a:fld id="{6D78B8F9-767A-4546-9D20-2187B79FBE53}" type="slidenum">
               <a:rPr lang="fr-BE" smtClean="0"/>
-              <a:t>‹#›</a:t>
+              <a:t>‹N°›</a:t>
             </a:fld>
             <a:endParaRPr lang="fr-BE"/>
           </a:p>
@@ -1241,7 +1246,7 @@
           <a:p>
             <a:fld id="{961B25C4-57E3-4BAD-9025-80D611C580C5}" type="datetime1">
               <a:rPr lang="fr-BE" smtClean="0"/>
-              <a:t>23-03-26</a:t>
+              <a:t>29-03-26</a:t>
             </a:fld>
             <a:endParaRPr lang="fr-BE"/>
           </a:p>
@@ -1295,7 +1300,7 @@
           <a:p>
             <a:fld id="{6D78B8F9-767A-4546-9D20-2187B79FBE53}" type="slidenum">
               <a:rPr lang="fr-BE" smtClean="0"/>
-              <a:t>‹#›</a:t>
+              <a:t>‹N°›</a:t>
             </a:fld>
             <a:endParaRPr lang="fr-BE"/>
           </a:p>
@@ -1517,7 +1522,7 @@
           <a:p>
             <a:fld id="{F6AEE8E9-C149-4CBD-8A27-D3C134FE4790}" type="datetime1">
               <a:rPr lang="fr-BE" smtClean="0"/>
-              <a:t>23-03-26</a:t>
+              <a:t>29-03-26</a:t>
             </a:fld>
             <a:endParaRPr lang="fr-BE"/>
           </a:p>
@@ -1571,7 +1576,7 @@
           <a:p>
             <a:fld id="{6D78B8F9-767A-4546-9D20-2187B79FBE53}" type="slidenum">
               <a:rPr lang="fr-BE" smtClean="0"/>
-              <a:t>‹#›</a:t>
+              <a:t>‹N°›</a:t>
             </a:fld>
             <a:endParaRPr lang="fr-BE"/>
           </a:p>
@@ -1785,7 +1790,7 @@
           <a:p>
             <a:fld id="{8B50408B-0B2E-4C7C-AA7F-063F6F6EF8C4}" type="datetime1">
               <a:rPr lang="fr-BE" smtClean="0"/>
-              <a:t>23-03-26</a:t>
+              <a:t>29-03-26</a:t>
             </a:fld>
             <a:endParaRPr lang="fr-BE"/>
           </a:p>
@@ -1839,7 +1844,7 @@
           <a:p>
             <a:fld id="{6D78B8F9-767A-4546-9D20-2187B79FBE53}" type="slidenum">
               <a:rPr lang="fr-BE" smtClean="0"/>
-              <a:t>‹#›</a:t>
+              <a:t>‹N°›</a:t>
             </a:fld>
             <a:endParaRPr lang="fr-BE"/>
           </a:p>
@@ -2200,7 +2205,7 @@
           <a:p>
             <a:fld id="{171C273B-A74A-48F8-A6D4-D84FC06B84B9}" type="datetime1">
               <a:rPr lang="fr-BE" smtClean="0"/>
-              <a:t>23-03-26</a:t>
+              <a:t>29-03-26</a:t>
             </a:fld>
             <a:endParaRPr lang="fr-BE"/>
           </a:p>
@@ -2254,7 +2259,7 @@
           <a:p>
             <a:fld id="{6D78B8F9-767A-4546-9D20-2187B79FBE53}" type="slidenum">
               <a:rPr lang="fr-BE" smtClean="0"/>
-              <a:t>‹#›</a:t>
+              <a:t>‹N°›</a:t>
             </a:fld>
             <a:endParaRPr lang="fr-BE"/>
           </a:p>
@@ -2342,7 +2347,7 @@
           <a:p>
             <a:fld id="{938A11E5-1A77-4A3C-9204-B04202A08EF6}" type="datetime1">
               <a:rPr lang="fr-BE" smtClean="0"/>
-              <a:t>23-03-26</a:t>
+              <a:t>29-03-26</a:t>
             </a:fld>
             <a:endParaRPr lang="fr-BE"/>
           </a:p>
@@ -2396,7 +2401,7 @@
           <a:p>
             <a:fld id="{6D78B8F9-767A-4546-9D20-2187B79FBE53}" type="slidenum">
               <a:rPr lang="fr-BE" smtClean="0"/>
-              <a:t>‹#›</a:t>
+              <a:t>‹N°›</a:t>
             </a:fld>
             <a:endParaRPr lang="fr-BE"/>
           </a:p>
@@ -2455,7 +2460,7 @@
           <a:p>
             <a:fld id="{7ADA988F-6694-47E8-858D-407A6329EFB0}" type="datetime1">
               <a:rPr lang="fr-BE" smtClean="0"/>
-              <a:t>23-03-26</a:t>
+              <a:t>29-03-26</a:t>
             </a:fld>
             <a:endParaRPr lang="fr-BE"/>
           </a:p>
@@ -2509,7 +2514,7 @@
           <a:p>
             <a:fld id="{6D78B8F9-767A-4546-9D20-2187B79FBE53}" type="slidenum">
               <a:rPr lang="fr-BE" smtClean="0"/>
-              <a:t>‹#›</a:t>
+              <a:t>‹N°›</a:t>
             </a:fld>
             <a:endParaRPr lang="fr-BE"/>
           </a:p>
@@ -2768,7 +2773,7 @@
           <a:p>
             <a:fld id="{E0B35633-F119-425E-B57E-850D62C8335C}" type="datetime1">
               <a:rPr lang="fr-BE" smtClean="0"/>
-              <a:t>23-03-26</a:t>
+              <a:t>29-03-26</a:t>
             </a:fld>
             <a:endParaRPr lang="fr-BE"/>
           </a:p>
@@ -2822,7 +2827,7 @@
           <a:p>
             <a:fld id="{6D78B8F9-767A-4546-9D20-2187B79FBE53}" type="slidenum">
               <a:rPr lang="fr-BE" smtClean="0"/>
-              <a:t>‹#›</a:t>
+              <a:t>‹N°›</a:t>
             </a:fld>
             <a:endParaRPr lang="fr-BE"/>
           </a:p>
@@ -3057,7 +3062,7 @@
           <a:p>
             <a:fld id="{32ECA291-4A83-4694-9EB9-29897EE83568}" type="datetime1">
               <a:rPr lang="fr-BE" smtClean="0"/>
-              <a:t>23-03-26</a:t>
+              <a:t>29-03-26</a:t>
             </a:fld>
             <a:endParaRPr lang="fr-BE"/>
           </a:p>
@@ -3111,7 +3116,7 @@
           <a:p>
             <a:fld id="{6D78B8F9-767A-4546-9D20-2187B79FBE53}" type="slidenum">
               <a:rPr lang="fr-BE" smtClean="0"/>
-              <a:t>‹#›</a:t>
+              <a:t>‹N°›</a:t>
             </a:fld>
             <a:endParaRPr lang="fr-BE"/>
           </a:p>
@@ -3300,7 +3305,7 @@
           <a:p>
             <a:fld id="{85A3AF2D-059E-4402-BD1F-D0C247FC3B3C}" type="datetime1">
               <a:rPr lang="fr-BE" smtClean="0"/>
-              <a:t>23-03-26</a:t>
+              <a:t>29-03-26</a:t>
             </a:fld>
             <a:endParaRPr lang="fr-BE"/>
           </a:p>
@@ -3390,7 +3395,7 @@
           <a:p>
             <a:fld id="{6D78B8F9-767A-4546-9D20-2187B79FBE53}" type="slidenum">
               <a:rPr lang="fr-BE" smtClean="0"/>
-              <a:t>‹#›</a:t>
+              <a:t>‹N°›</a:t>
             </a:fld>
             <a:endParaRPr lang="fr-BE"/>
           </a:p>
@@ -3927,6 +3932,785 @@
     <p:extLst>
       <p:ext uri="{BB962C8B-B14F-4D97-AF65-F5344CB8AC3E}">
         <p14:creationId xmlns:p14="http://schemas.microsoft.com/office/powerpoint/2010/main" val="1681758928"/>
+      </p:ext>
+    </p:extLst>
+  </p:cSld>
+  <p:clrMapOvr>
+    <a:masterClrMapping/>
+  </p:clrMapOvr>
+</p:sld>
+</file>
+
+<file path=ppt/slides/slide11.xml><?xml version="1.0" encoding="utf-8"?>
+<p:sld xmlns:a="http://schemas.openxmlformats.org/drawingml/2006/main" xmlns:r="http://schemas.openxmlformats.org/officeDocument/2006/relationships" xmlns:p="http://schemas.openxmlformats.org/presentationml/2006/main">
+  <p:cSld>
+    <p:spTree>
+      <p:nvGrpSpPr>
+        <p:cNvPr id="1" name=""/>
+        <p:cNvGrpSpPr/>
+        <p:nvPr/>
+      </p:nvGrpSpPr>
+      <p:grpSpPr>
+        <a:xfrm>
+          <a:off x="0" y="0"/>
+          <a:ext cx="0" cy="0"/>
+          <a:chOff x="0" y="0"/>
+          <a:chExt cx="0" cy="0"/>
+        </a:xfrm>
+      </p:grpSpPr>
+      <p:sp>
+        <p:nvSpPr>
+          <p:cNvPr id="2" name="Titre 1">
+            <a:extLst>
+              <a:ext uri="{FF2B5EF4-FFF2-40B4-BE49-F238E27FC236}">
+                <a16:creationId xmlns:a16="http://schemas.microsoft.com/office/drawing/2014/main" id="{123CE9BD-836B-0C7E-161F-C886EFC95CC3}"/>
+              </a:ext>
+            </a:extLst>
+          </p:cNvPr>
+          <p:cNvSpPr>
+            <a:spLocks noGrp="1"/>
+          </p:cNvSpPr>
+          <p:nvPr>
+            <p:ph type="title"/>
+          </p:nvPr>
+        </p:nvSpPr>
+        <p:spPr/>
+        <p:txBody>
+          <a:bodyPr/>
+          <a:lstStyle/>
+          <a:p>
+            <a:r>
+              <a:rPr lang="fr-BE"/>
+              <a:t>Interopérabilité</a:t>
+            </a:r>
+            <a:endParaRPr lang="fr-BE" dirty="0"/>
+          </a:p>
+        </p:txBody>
+      </p:sp>
+      <p:sp>
+        <p:nvSpPr>
+          <p:cNvPr id="3" name="Espace réservé du contenu 2">
+            <a:extLst>
+              <a:ext uri="{FF2B5EF4-FFF2-40B4-BE49-F238E27FC236}">
+                <a16:creationId xmlns:a16="http://schemas.microsoft.com/office/drawing/2014/main" id="{55059F73-2D2C-B7FA-DB24-8D7379948733}"/>
+              </a:ext>
+            </a:extLst>
+          </p:cNvPr>
+          <p:cNvSpPr>
+            <a:spLocks noGrp="1"/>
+          </p:cNvSpPr>
+          <p:nvPr>
+            <p:ph idx="1"/>
+          </p:nvPr>
+        </p:nvSpPr>
+        <p:spPr/>
+        <p:txBody>
+          <a:bodyPr/>
+          <a:lstStyle/>
+          <a:p>
+            <a:r>
+              <a:rPr lang="fr-BE" dirty="0"/>
+              <a:t>Tests avec groupes 42 et 61</a:t>
+            </a:r>
+          </a:p>
+          <a:p>
+            <a:r>
+              <a:rPr lang="fr-BE" dirty="0"/>
+              <a:t>Notre serveur/client fonctionnait avec ceux de ces groupes</a:t>
+            </a:r>
+          </a:p>
+          <a:p>
+            <a:r>
+              <a:rPr lang="fr-BE" b="1" dirty="0"/>
+              <a:t>Inconvénients</a:t>
+            </a:r>
+            <a:r>
+              <a:rPr lang="fr-BE" dirty="0"/>
+              <a:t>: problèmes dans certains cas de transfert : avec beaucoup perte, fichiers volumineux</a:t>
+            </a:r>
+          </a:p>
+          <a:p>
+            <a:endParaRPr lang="fr-BE" dirty="0"/>
+          </a:p>
+        </p:txBody>
+      </p:sp>
+      <p:sp>
+        <p:nvSpPr>
+          <p:cNvPr id="4" name="Espace réservé du numéro de diapositive 3">
+            <a:extLst>
+              <a:ext uri="{FF2B5EF4-FFF2-40B4-BE49-F238E27FC236}">
+                <a16:creationId xmlns:a16="http://schemas.microsoft.com/office/drawing/2014/main" id="{1FA693CD-153F-6964-AA81-1D85138C87A2}"/>
+              </a:ext>
+            </a:extLst>
+          </p:cNvPr>
+          <p:cNvSpPr>
+            <a:spLocks noGrp="1"/>
+          </p:cNvSpPr>
+          <p:nvPr>
+            <p:ph type="sldNum" sz="quarter" idx="12"/>
+          </p:nvPr>
+        </p:nvSpPr>
+        <p:spPr/>
+        <p:txBody>
+          <a:bodyPr/>
+          <a:lstStyle/>
+          <a:p>
+            <a:fld id="{6D78B8F9-767A-4546-9D20-2187B79FBE53}" type="slidenum">
+              <a:rPr lang="fr-BE" smtClean="0"/>
+              <a:t>11</a:t>
+            </a:fld>
+            <a:endParaRPr lang="fr-BE"/>
+          </a:p>
+        </p:txBody>
+      </p:sp>
+    </p:spTree>
+    <p:extLst>
+      <p:ext uri="{BB962C8B-B14F-4D97-AF65-F5344CB8AC3E}">
+        <p14:creationId xmlns:p14="http://schemas.microsoft.com/office/powerpoint/2010/main" val="2449368959"/>
+      </p:ext>
+    </p:extLst>
+  </p:cSld>
+  <p:clrMapOvr>
+    <a:masterClrMapping/>
+  </p:clrMapOvr>
+</p:sld>
+</file>
+
+<file path=ppt/slides/slide12.xml><?xml version="1.0" encoding="utf-8"?>
+<p:sld xmlns:a="http://schemas.openxmlformats.org/drawingml/2006/main" xmlns:r="http://schemas.openxmlformats.org/officeDocument/2006/relationships" xmlns:p="http://schemas.openxmlformats.org/presentationml/2006/main">
+  <p:cSld>
+    <p:spTree>
+      <p:nvGrpSpPr>
+        <p:cNvPr id="1" name=""/>
+        <p:cNvGrpSpPr/>
+        <p:nvPr/>
+      </p:nvGrpSpPr>
+      <p:grpSpPr>
+        <a:xfrm>
+          <a:off x="0" y="0"/>
+          <a:ext cx="0" cy="0"/>
+          <a:chOff x="0" y="0"/>
+          <a:chExt cx="0" cy="0"/>
+        </a:xfrm>
+      </p:grpSpPr>
+      <p:sp>
+        <p:nvSpPr>
+          <p:cNvPr id="2" name="Titre 1">
+            <a:extLst>
+              <a:ext uri="{FF2B5EF4-FFF2-40B4-BE49-F238E27FC236}">
+                <a16:creationId xmlns:a16="http://schemas.microsoft.com/office/drawing/2014/main" id="{B68311AB-3FCB-0A3F-7B5D-62731D43B0E9}"/>
+              </a:ext>
+            </a:extLst>
+          </p:cNvPr>
+          <p:cNvSpPr>
+            <a:spLocks noGrp="1"/>
+          </p:cNvSpPr>
+          <p:nvPr>
+            <p:ph type="title"/>
+          </p:nvPr>
+        </p:nvSpPr>
+        <p:spPr/>
+        <p:txBody>
+          <a:bodyPr/>
+          <a:lstStyle/>
+          <a:p>
+            <a:r>
+              <a:rPr lang="fr-BE" dirty="0"/>
+              <a:t>Groupe 42 : client </a:t>
+            </a:r>
+          </a:p>
+        </p:txBody>
+      </p:sp>
+      <p:pic>
+        <p:nvPicPr>
+          <p:cNvPr id="6" name="Espace réservé du contenu 5">
+            <a:extLst>
+              <a:ext uri="{FF2B5EF4-FFF2-40B4-BE49-F238E27FC236}">
+                <a16:creationId xmlns:a16="http://schemas.microsoft.com/office/drawing/2014/main" id="{E60A743A-A54D-6D1E-B418-4F260592A588}"/>
+              </a:ext>
+            </a:extLst>
+          </p:cNvPr>
+          <p:cNvPicPr>
+            <a:picLocks noGrp="1" noChangeAspect="1"/>
+          </p:cNvPicPr>
+          <p:nvPr>
+            <p:ph idx="1"/>
+          </p:nvPr>
+        </p:nvPicPr>
+        <p:blipFill>
+          <a:blip r:embed="rId2">
+            <a:extLst>
+              <a:ext uri="{28A0092B-C50C-407E-A947-70E740481C1C}">
+                <a14:useLocalDpi xmlns:a14="http://schemas.microsoft.com/office/drawing/2010/main" val="0"/>
+              </a:ext>
+            </a:extLst>
+          </a:blip>
+          <a:stretch>
+            <a:fillRect/>
+          </a:stretch>
+        </p:blipFill>
+        <p:spPr>
+          <a:xfrm>
+            <a:off x="72993" y="2418540"/>
+            <a:ext cx="6402420" cy="3201210"/>
+          </a:xfrm>
+          <a:prstGeom prst="rect">
+            <a:avLst/>
+          </a:prstGeom>
+        </p:spPr>
+      </p:pic>
+      <p:sp>
+        <p:nvSpPr>
+          <p:cNvPr id="4" name="Espace réservé du numéro de diapositive 3">
+            <a:extLst>
+              <a:ext uri="{FF2B5EF4-FFF2-40B4-BE49-F238E27FC236}">
+                <a16:creationId xmlns:a16="http://schemas.microsoft.com/office/drawing/2014/main" id="{FFD7506A-80FB-5AD0-9477-CE5E1B5476A7}"/>
+              </a:ext>
+            </a:extLst>
+          </p:cNvPr>
+          <p:cNvSpPr>
+            <a:spLocks noGrp="1"/>
+          </p:cNvSpPr>
+          <p:nvPr>
+            <p:ph type="sldNum" sz="quarter" idx="12"/>
+          </p:nvPr>
+        </p:nvSpPr>
+        <p:spPr/>
+        <p:txBody>
+          <a:bodyPr/>
+          <a:lstStyle/>
+          <a:p>
+            <a:fld id="{6D78B8F9-767A-4546-9D20-2187B79FBE53}" type="slidenum">
+              <a:rPr lang="fr-BE" smtClean="0"/>
+              <a:t>12</a:t>
+            </a:fld>
+            <a:endParaRPr lang="fr-BE"/>
+          </a:p>
+        </p:txBody>
+      </p:sp>
+      <p:pic>
+        <p:nvPicPr>
+          <p:cNvPr id="8" name="Image 7">
+            <a:extLst>
+              <a:ext uri="{FF2B5EF4-FFF2-40B4-BE49-F238E27FC236}">
+                <a16:creationId xmlns:a16="http://schemas.microsoft.com/office/drawing/2014/main" id="{45644E7F-1B58-0673-3D96-61D96B02D8E3}"/>
+              </a:ext>
+            </a:extLst>
+          </p:cNvPr>
+          <p:cNvPicPr>
+            <a:picLocks noChangeAspect="1"/>
+          </p:cNvPicPr>
+          <p:nvPr/>
+        </p:nvPicPr>
+        <p:blipFill>
+          <a:blip r:embed="rId3">
+            <a:extLst>
+              <a:ext uri="{28A0092B-C50C-407E-A947-70E740481C1C}">
+                <a14:useLocalDpi xmlns:a14="http://schemas.microsoft.com/office/drawing/2010/main" val="0"/>
+              </a:ext>
+            </a:extLst>
+          </a:blip>
+          <a:stretch>
+            <a:fillRect/>
+          </a:stretch>
+        </p:blipFill>
+        <p:spPr>
+          <a:xfrm>
+            <a:off x="6475413" y="2418540"/>
+            <a:ext cx="5602118" cy="3201210"/>
+          </a:xfrm>
+          <a:prstGeom prst="rect">
+            <a:avLst/>
+          </a:prstGeom>
+        </p:spPr>
+      </p:pic>
+    </p:spTree>
+    <p:extLst>
+      <p:ext uri="{BB962C8B-B14F-4D97-AF65-F5344CB8AC3E}">
+        <p14:creationId xmlns:p14="http://schemas.microsoft.com/office/powerpoint/2010/main" val="840099709"/>
+      </p:ext>
+    </p:extLst>
+  </p:cSld>
+  <p:clrMapOvr>
+    <a:masterClrMapping/>
+  </p:clrMapOvr>
+</p:sld>
+</file>
+
+<file path=ppt/slides/slide13.xml><?xml version="1.0" encoding="utf-8"?>
+<p:sld xmlns:a="http://schemas.openxmlformats.org/drawingml/2006/main" xmlns:r="http://schemas.openxmlformats.org/officeDocument/2006/relationships" xmlns:p="http://schemas.openxmlformats.org/presentationml/2006/main">
+  <p:cSld>
+    <p:spTree>
+      <p:nvGrpSpPr>
+        <p:cNvPr id="1" name=""/>
+        <p:cNvGrpSpPr/>
+        <p:nvPr/>
+      </p:nvGrpSpPr>
+      <p:grpSpPr>
+        <a:xfrm>
+          <a:off x="0" y="0"/>
+          <a:ext cx="0" cy="0"/>
+          <a:chOff x="0" y="0"/>
+          <a:chExt cx="0" cy="0"/>
+        </a:xfrm>
+      </p:grpSpPr>
+      <p:sp>
+        <p:nvSpPr>
+          <p:cNvPr id="2" name="Titre 1">
+            <a:extLst>
+              <a:ext uri="{FF2B5EF4-FFF2-40B4-BE49-F238E27FC236}">
+                <a16:creationId xmlns:a16="http://schemas.microsoft.com/office/drawing/2014/main" id="{F0C50155-C276-445A-4D99-24B8E36453EE}"/>
+              </a:ext>
+            </a:extLst>
+          </p:cNvPr>
+          <p:cNvSpPr>
+            <a:spLocks noGrp="1"/>
+          </p:cNvSpPr>
+          <p:nvPr>
+            <p:ph type="title"/>
+          </p:nvPr>
+        </p:nvSpPr>
+        <p:spPr/>
+        <p:txBody>
+          <a:bodyPr/>
+          <a:lstStyle/>
+          <a:p>
+            <a:r>
+              <a:rPr lang="fr-BE" dirty="0"/>
+              <a:t>Groupe 42 : serveur</a:t>
+            </a:r>
+          </a:p>
+        </p:txBody>
+      </p:sp>
+      <p:pic>
+        <p:nvPicPr>
+          <p:cNvPr id="6" name="Espace réservé du contenu 5">
+            <a:extLst>
+              <a:ext uri="{FF2B5EF4-FFF2-40B4-BE49-F238E27FC236}">
+                <a16:creationId xmlns:a16="http://schemas.microsoft.com/office/drawing/2014/main" id="{AD568A98-3DE8-0E47-5186-7DD19EC47677}"/>
+              </a:ext>
+            </a:extLst>
+          </p:cNvPr>
+          <p:cNvPicPr>
+            <a:picLocks noGrp="1" noChangeAspect="1"/>
+          </p:cNvPicPr>
+          <p:nvPr>
+            <p:ph idx="1"/>
+          </p:nvPr>
+        </p:nvPicPr>
+        <p:blipFill>
+          <a:blip r:embed="rId2">
+            <a:extLst>
+              <a:ext uri="{28A0092B-C50C-407E-A947-70E740481C1C}">
+                <a14:useLocalDpi xmlns:a14="http://schemas.microsoft.com/office/drawing/2010/main" val="0"/>
+              </a:ext>
+            </a:extLst>
+          </a:blip>
+          <a:stretch>
+            <a:fillRect/>
+          </a:stretch>
+        </p:blipFill>
+        <p:spPr>
+          <a:xfrm>
+            <a:off x="211137" y="2438400"/>
+            <a:ext cx="6126163" cy="3063082"/>
+          </a:xfrm>
+          <a:prstGeom prst="rect">
+            <a:avLst/>
+          </a:prstGeom>
+        </p:spPr>
+      </p:pic>
+      <p:sp>
+        <p:nvSpPr>
+          <p:cNvPr id="4" name="Espace réservé du numéro de diapositive 3">
+            <a:extLst>
+              <a:ext uri="{FF2B5EF4-FFF2-40B4-BE49-F238E27FC236}">
+                <a16:creationId xmlns:a16="http://schemas.microsoft.com/office/drawing/2014/main" id="{242ED05C-0E69-D7BE-504F-2F027B8A83FF}"/>
+              </a:ext>
+            </a:extLst>
+          </p:cNvPr>
+          <p:cNvSpPr>
+            <a:spLocks noGrp="1"/>
+          </p:cNvSpPr>
+          <p:nvPr>
+            <p:ph type="sldNum" sz="quarter" idx="12"/>
+          </p:nvPr>
+        </p:nvSpPr>
+        <p:spPr/>
+        <p:txBody>
+          <a:bodyPr/>
+          <a:lstStyle/>
+          <a:p>
+            <a:fld id="{6D78B8F9-767A-4546-9D20-2187B79FBE53}" type="slidenum">
+              <a:rPr lang="fr-BE" smtClean="0"/>
+              <a:t>13</a:t>
+            </a:fld>
+            <a:endParaRPr lang="fr-BE"/>
+          </a:p>
+        </p:txBody>
+      </p:sp>
+      <p:pic>
+        <p:nvPicPr>
+          <p:cNvPr id="8" name="Image 7">
+            <a:extLst>
+              <a:ext uri="{FF2B5EF4-FFF2-40B4-BE49-F238E27FC236}">
+                <a16:creationId xmlns:a16="http://schemas.microsoft.com/office/drawing/2014/main" id="{12ABAEA9-19B7-F5C0-8529-36CF19C70320}"/>
+              </a:ext>
+            </a:extLst>
+          </p:cNvPr>
+          <p:cNvPicPr>
+            <a:picLocks noChangeAspect="1"/>
+          </p:cNvPicPr>
+          <p:nvPr/>
+        </p:nvPicPr>
+        <p:blipFill>
+          <a:blip r:embed="rId3">
+            <a:extLst>
+              <a:ext uri="{28A0092B-C50C-407E-A947-70E740481C1C}">
+                <a14:useLocalDpi xmlns:a14="http://schemas.microsoft.com/office/drawing/2010/main" val="0"/>
+              </a:ext>
+            </a:extLst>
+          </a:blip>
+          <a:stretch>
+            <a:fillRect/>
+          </a:stretch>
+        </p:blipFill>
+        <p:spPr>
+          <a:xfrm>
+            <a:off x="6334124" y="2352675"/>
+            <a:ext cx="5669856" cy="3239917"/>
+          </a:xfrm>
+          <a:prstGeom prst="rect">
+            <a:avLst/>
+          </a:prstGeom>
+        </p:spPr>
+      </p:pic>
+    </p:spTree>
+    <p:extLst>
+      <p:ext uri="{BB962C8B-B14F-4D97-AF65-F5344CB8AC3E}">
+        <p14:creationId xmlns:p14="http://schemas.microsoft.com/office/powerpoint/2010/main" val="712075142"/>
+      </p:ext>
+    </p:extLst>
+  </p:cSld>
+  <p:clrMapOvr>
+    <a:masterClrMapping/>
+  </p:clrMapOvr>
+</p:sld>
+</file>
+
+<file path=ppt/slides/slide14.xml><?xml version="1.0" encoding="utf-8"?>
+<p:sld xmlns:a="http://schemas.openxmlformats.org/drawingml/2006/main" xmlns:r="http://schemas.openxmlformats.org/officeDocument/2006/relationships" xmlns:p="http://schemas.openxmlformats.org/presentationml/2006/main">
+  <p:cSld>
+    <p:spTree>
+      <p:nvGrpSpPr>
+        <p:cNvPr id="1" name=""/>
+        <p:cNvGrpSpPr/>
+        <p:nvPr/>
+      </p:nvGrpSpPr>
+      <p:grpSpPr>
+        <a:xfrm>
+          <a:off x="0" y="0"/>
+          <a:ext cx="0" cy="0"/>
+          <a:chOff x="0" y="0"/>
+          <a:chExt cx="0" cy="0"/>
+        </a:xfrm>
+      </p:grpSpPr>
+      <p:sp>
+        <p:nvSpPr>
+          <p:cNvPr id="2" name="Titre 1">
+            <a:extLst>
+              <a:ext uri="{FF2B5EF4-FFF2-40B4-BE49-F238E27FC236}">
+                <a16:creationId xmlns:a16="http://schemas.microsoft.com/office/drawing/2014/main" id="{F250D55E-BC4A-33D1-6745-FC467447A717}"/>
+              </a:ext>
+            </a:extLst>
+          </p:cNvPr>
+          <p:cNvSpPr>
+            <a:spLocks noGrp="1"/>
+          </p:cNvSpPr>
+          <p:nvPr>
+            <p:ph type="title"/>
+          </p:nvPr>
+        </p:nvSpPr>
+        <p:spPr/>
+        <p:txBody>
+          <a:bodyPr/>
+          <a:lstStyle/>
+          <a:p>
+            <a:r>
+              <a:rPr lang="fr-BE" dirty="0"/>
+              <a:t>Groupe 61 : client</a:t>
+            </a:r>
+          </a:p>
+        </p:txBody>
+      </p:sp>
+      <p:pic>
+        <p:nvPicPr>
+          <p:cNvPr id="6" name="Espace réservé du contenu 5">
+            <a:extLst>
+              <a:ext uri="{FF2B5EF4-FFF2-40B4-BE49-F238E27FC236}">
+                <a16:creationId xmlns:a16="http://schemas.microsoft.com/office/drawing/2014/main" id="{FB55145F-030B-3E78-F392-1858143A71E6}"/>
+              </a:ext>
+            </a:extLst>
+          </p:cNvPr>
+          <p:cNvPicPr>
+            <a:picLocks noGrp="1" noChangeAspect="1"/>
+          </p:cNvPicPr>
+          <p:nvPr>
+            <p:ph idx="1"/>
+          </p:nvPr>
+        </p:nvPicPr>
+        <p:blipFill>
+          <a:blip r:embed="rId2">
+            <a:extLst>
+              <a:ext uri="{28A0092B-C50C-407E-A947-70E740481C1C}">
+                <a14:useLocalDpi xmlns:a14="http://schemas.microsoft.com/office/drawing/2010/main" val="0"/>
+              </a:ext>
+            </a:extLst>
+          </a:blip>
+          <a:stretch>
+            <a:fillRect/>
+          </a:stretch>
+        </p:blipFill>
+        <p:spPr>
+          <a:xfrm>
+            <a:off x="268287" y="2414983"/>
+            <a:ext cx="6038057" cy="3019029"/>
+          </a:xfrm>
+          <a:prstGeom prst="rect">
+            <a:avLst/>
+          </a:prstGeom>
+        </p:spPr>
+      </p:pic>
+      <p:sp>
+        <p:nvSpPr>
+          <p:cNvPr id="4" name="Espace réservé du numéro de diapositive 3">
+            <a:extLst>
+              <a:ext uri="{FF2B5EF4-FFF2-40B4-BE49-F238E27FC236}">
+                <a16:creationId xmlns:a16="http://schemas.microsoft.com/office/drawing/2014/main" id="{0EF9D598-00AC-BF91-5B26-0A0E9DF9E9E0}"/>
+              </a:ext>
+            </a:extLst>
+          </p:cNvPr>
+          <p:cNvSpPr>
+            <a:spLocks noGrp="1"/>
+          </p:cNvSpPr>
+          <p:nvPr>
+            <p:ph type="sldNum" sz="quarter" idx="12"/>
+          </p:nvPr>
+        </p:nvSpPr>
+        <p:spPr/>
+        <p:txBody>
+          <a:bodyPr/>
+          <a:lstStyle/>
+          <a:p>
+            <a:fld id="{6D78B8F9-767A-4546-9D20-2187B79FBE53}" type="slidenum">
+              <a:rPr lang="fr-BE" smtClean="0"/>
+              <a:t>14</a:t>
+            </a:fld>
+            <a:endParaRPr lang="fr-BE"/>
+          </a:p>
+        </p:txBody>
+      </p:sp>
+      <p:pic>
+        <p:nvPicPr>
+          <p:cNvPr id="8" name="Image 7">
+            <a:extLst>
+              <a:ext uri="{FF2B5EF4-FFF2-40B4-BE49-F238E27FC236}">
+                <a16:creationId xmlns:a16="http://schemas.microsoft.com/office/drawing/2014/main" id="{0CCD067A-F313-22E6-1938-30CC9BBFE7A4}"/>
+              </a:ext>
+            </a:extLst>
+          </p:cNvPr>
+          <p:cNvPicPr>
+            <a:picLocks noChangeAspect="1"/>
+          </p:cNvPicPr>
+          <p:nvPr/>
+        </p:nvPicPr>
+        <p:blipFill>
+          <a:blip r:embed="rId3">
+            <a:extLst>
+              <a:ext uri="{28A0092B-C50C-407E-A947-70E740481C1C}">
+                <a14:useLocalDpi xmlns:a14="http://schemas.microsoft.com/office/drawing/2010/main" val="0"/>
+              </a:ext>
+            </a:extLst>
+          </a:blip>
+          <a:stretch>
+            <a:fillRect/>
+          </a:stretch>
+        </p:blipFill>
+        <p:spPr>
+          <a:xfrm>
+            <a:off x="6296025" y="2286000"/>
+            <a:ext cx="5693070" cy="3253183"/>
+          </a:xfrm>
+          <a:prstGeom prst="rect">
+            <a:avLst/>
+          </a:prstGeom>
+        </p:spPr>
+      </p:pic>
+    </p:spTree>
+    <p:extLst>
+      <p:ext uri="{BB962C8B-B14F-4D97-AF65-F5344CB8AC3E}">
+        <p14:creationId xmlns:p14="http://schemas.microsoft.com/office/powerpoint/2010/main" val="3386175126"/>
+      </p:ext>
+    </p:extLst>
+  </p:cSld>
+  <p:clrMapOvr>
+    <a:masterClrMapping/>
+  </p:clrMapOvr>
+</p:sld>
+</file>
+
+<file path=ppt/slides/slide15.xml><?xml version="1.0" encoding="utf-8"?>
+<p:sld xmlns:a="http://schemas.openxmlformats.org/drawingml/2006/main" xmlns:r="http://schemas.openxmlformats.org/officeDocument/2006/relationships" xmlns:p="http://schemas.openxmlformats.org/presentationml/2006/main">
+  <p:cSld>
+    <p:spTree>
+      <p:nvGrpSpPr>
+        <p:cNvPr id="1" name=""/>
+        <p:cNvGrpSpPr/>
+        <p:nvPr/>
+      </p:nvGrpSpPr>
+      <p:grpSpPr>
+        <a:xfrm>
+          <a:off x="0" y="0"/>
+          <a:ext cx="0" cy="0"/>
+          <a:chOff x="0" y="0"/>
+          <a:chExt cx="0" cy="0"/>
+        </a:xfrm>
+      </p:grpSpPr>
+      <p:sp>
+        <p:nvSpPr>
+          <p:cNvPr id="2" name="Titre 1">
+            <a:extLst>
+              <a:ext uri="{FF2B5EF4-FFF2-40B4-BE49-F238E27FC236}">
+                <a16:creationId xmlns:a16="http://schemas.microsoft.com/office/drawing/2014/main" id="{6D86D28D-9027-7ED2-5949-D151544A2E87}"/>
+              </a:ext>
+            </a:extLst>
+          </p:cNvPr>
+          <p:cNvSpPr>
+            <a:spLocks noGrp="1"/>
+          </p:cNvSpPr>
+          <p:nvPr>
+            <p:ph type="title"/>
+          </p:nvPr>
+        </p:nvSpPr>
+        <p:spPr/>
+        <p:txBody>
+          <a:bodyPr/>
+          <a:lstStyle/>
+          <a:p>
+            <a:r>
+              <a:rPr lang="fr-BE" dirty="0"/>
+              <a:t>Groupe 61 : serveur</a:t>
+            </a:r>
+          </a:p>
+        </p:txBody>
+      </p:sp>
+      <p:pic>
+        <p:nvPicPr>
+          <p:cNvPr id="6" name="Espace réservé du contenu 5">
+            <a:extLst>
+              <a:ext uri="{FF2B5EF4-FFF2-40B4-BE49-F238E27FC236}">
+                <a16:creationId xmlns:a16="http://schemas.microsoft.com/office/drawing/2014/main" id="{7B2E3D63-4604-FBFB-6137-3D5CDCC1245D}"/>
+              </a:ext>
+            </a:extLst>
+          </p:cNvPr>
+          <p:cNvPicPr>
+            <a:picLocks noGrp="1" noChangeAspect="1"/>
+          </p:cNvPicPr>
+          <p:nvPr>
+            <p:ph idx="1"/>
+          </p:nvPr>
+        </p:nvPicPr>
+        <p:blipFill>
+          <a:blip r:embed="rId2">
+            <a:extLst>
+              <a:ext uri="{28A0092B-C50C-407E-A947-70E740481C1C}">
+                <a14:useLocalDpi xmlns:a14="http://schemas.microsoft.com/office/drawing/2010/main" val="0"/>
+              </a:ext>
+            </a:extLst>
+          </a:blip>
+          <a:stretch>
+            <a:fillRect/>
+          </a:stretch>
+        </p:blipFill>
+        <p:spPr>
+          <a:xfrm>
+            <a:off x="220663" y="2581276"/>
+            <a:ext cx="5836444" cy="2918222"/>
+          </a:xfrm>
+          <a:prstGeom prst="rect">
+            <a:avLst/>
+          </a:prstGeom>
+        </p:spPr>
+      </p:pic>
+      <p:sp>
+        <p:nvSpPr>
+          <p:cNvPr id="4" name="Espace réservé du numéro de diapositive 3">
+            <a:extLst>
+              <a:ext uri="{FF2B5EF4-FFF2-40B4-BE49-F238E27FC236}">
+                <a16:creationId xmlns:a16="http://schemas.microsoft.com/office/drawing/2014/main" id="{BA3CB471-0A5B-C2DB-13AE-DE4DA2DEBA25}"/>
+              </a:ext>
+            </a:extLst>
+          </p:cNvPr>
+          <p:cNvSpPr>
+            <a:spLocks noGrp="1"/>
+          </p:cNvSpPr>
+          <p:nvPr>
+            <p:ph type="sldNum" sz="quarter" idx="12"/>
+          </p:nvPr>
+        </p:nvSpPr>
+        <p:spPr/>
+        <p:txBody>
+          <a:bodyPr/>
+          <a:lstStyle/>
+          <a:p>
+            <a:fld id="{6D78B8F9-767A-4546-9D20-2187B79FBE53}" type="slidenum">
+              <a:rPr lang="fr-BE" smtClean="0"/>
+              <a:t>15</a:t>
+            </a:fld>
+            <a:endParaRPr lang="fr-BE"/>
+          </a:p>
+        </p:txBody>
+      </p:sp>
+      <p:pic>
+        <p:nvPicPr>
+          <p:cNvPr id="8" name="Image 7">
+            <a:extLst>
+              <a:ext uri="{FF2B5EF4-FFF2-40B4-BE49-F238E27FC236}">
+                <a16:creationId xmlns:a16="http://schemas.microsoft.com/office/drawing/2014/main" id="{6C06F332-0350-9D88-6C5E-5594B07348A1}"/>
+              </a:ext>
+            </a:extLst>
+          </p:cNvPr>
+          <p:cNvPicPr>
+            <a:picLocks noChangeAspect="1"/>
+          </p:cNvPicPr>
+          <p:nvPr/>
+        </p:nvPicPr>
+        <p:blipFill>
+          <a:blip r:embed="rId3">
+            <a:extLst>
+              <a:ext uri="{28A0092B-C50C-407E-A947-70E740481C1C}">
+                <a14:useLocalDpi xmlns:a14="http://schemas.microsoft.com/office/drawing/2010/main" val="0"/>
+              </a:ext>
+            </a:extLst>
+          </a:blip>
+          <a:stretch>
+            <a:fillRect/>
+          </a:stretch>
+        </p:blipFill>
+        <p:spPr>
+          <a:xfrm>
+            <a:off x="6095999" y="2454048"/>
+            <a:ext cx="5572125" cy="3184071"/>
+          </a:xfrm>
+          <a:prstGeom prst="rect">
+            <a:avLst/>
+          </a:prstGeom>
+        </p:spPr>
+      </p:pic>
+    </p:spTree>
+    <p:extLst>
+      <p:ext uri="{BB962C8B-B14F-4D97-AF65-F5344CB8AC3E}">
+        <p14:creationId xmlns:p14="http://schemas.microsoft.com/office/powerpoint/2010/main" val="843684112"/>
       </p:ext>
     </p:extLst>
   </p:cSld>

--- a/Rapport_projet_SRTP.pptx
+++ b/Rapport_projet_SRTP.pptx
@@ -127,14 +127,6 @@
     </p:ext>
   </p:extLst>
 </p:presentation>
-</file>
-
-<file path=ppt/revisionInfo.xml><?xml version="1.0" encoding="utf-8"?>
-<p1510:revInfo xmlns:a="http://schemas.openxmlformats.org/drawingml/2006/main" xmlns:r="http://schemas.openxmlformats.org/officeDocument/2006/relationships" xmlns:p1510="http://schemas.microsoft.com/office/powerpoint/2015/10/main">
-  <p1510:revLst>
-    <p1510:client id="{4BE761C7-A3F9-14C5-3161-1B8A9EBBDBA1}" v="83" dt="2026-03-23T22:34:45.865"/>
-  </p1510:revLst>
-</p1510:revInfo>
 </file>
 
 <file path=ppt/notesMasters/notesMaster1.xml><?xml version="1.0" encoding="utf-8"?>
@@ -4021,16 +4013,9 @@
           </a:p>
           <a:p>
             <a:r>
-              <a:rPr lang="fr-BE" b="1" dirty="0"/>
-              <a:t>Inconvénients</a:t>
-            </a:r>
-            <a:r>
               <a:rPr lang="fr-BE" dirty="0"/>
-              <a:t>: problèmes dans certains cas de transfert : avec beaucoup perte, fichiers volumineux</a:t>
-            </a:r>
-          </a:p>
-          <a:p>
-            <a:endParaRPr lang="fr-BE" dirty="0"/>
+              <a:t>Problèmes: erreurs dans le serveur du groupe 61 menant à des résultats inattendus</a:t>
+            </a:r>
           </a:p>
         </p:txBody>
       </p:sp>
@@ -4151,7 +4136,7 @@
         </p:blipFill>
         <p:spPr>
           <a:xfrm>
-            <a:off x="72993" y="2418540"/>
+            <a:off x="0" y="3155140"/>
             <a:ext cx="6402420" cy="3201210"/>
           </a:xfrm>
           <a:prstGeom prst="rect">
@@ -4216,14 +4201,85 @@
         </p:blipFill>
         <p:spPr>
           <a:xfrm>
-            <a:off x="6475413" y="2418540"/>
-            <a:ext cx="5602118" cy="3201210"/>
+            <a:off x="6402420" y="3073391"/>
+            <a:ext cx="5745179" cy="3282959"/>
           </a:xfrm>
           <a:prstGeom prst="rect">
             <a:avLst/>
           </a:prstGeom>
         </p:spPr>
       </p:pic>
+      <p:sp>
+        <p:nvSpPr>
+          <p:cNvPr id="9" name="ZoneTexte 8">
+            <a:extLst>
+              <a:ext uri="{FF2B5EF4-FFF2-40B4-BE49-F238E27FC236}">
+                <a16:creationId xmlns:a16="http://schemas.microsoft.com/office/drawing/2014/main" id="{771E1D62-6D5A-B1AA-5EE5-76B93678CBFA}"/>
+              </a:ext>
+            </a:extLst>
+          </p:cNvPr>
+          <p:cNvSpPr txBox="1"/>
+          <p:nvPr/>
+        </p:nvSpPr>
+        <p:spPr>
+          <a:xfrm>
+            <a:off x="719424" y="1428246"/>
+            <a:ext cx="11365992" cy="1477328"/>
+          </a:xfrm>
+          <a:prstGeom prst="rect">
+            <a:avLst/>
+          </a:prstGeom>
+          <a:noFill/>
+        </p:spPr>
+        <p:txBody>
+          <a:bodyPr wrap="square" rtlCol="0">
+            <a:spAutoFit/>
+          </a:bodyPr>
+          <a:lstStyle/>
+          <a:p>
+            <a:r>
+              <a:rPr lang="fr-BE" b="1" dirty="0"/>
+              <a:t>Débit moyen selon taille des fichiers :</a:t>
+            </a:r>
+          </a:p>
+          <a:p>
+            <a:pPr marL="285750" indent="-285750">
+              <a:buFont typeface="Arial" panose="020B0604020202020204" pitchFamily="34" charset="0"/>
+              <a:buChar char="•"/>
+            </a:pPr>
+            <a:r>
+              <a:rPr lang="fr-BE" dirty="0"/>
+              <a:t>Similaire à celui avec notre client</a:t>
+            </a:r>
+          </a:p>
+          <a:p>
+            <a:r>
+              <a:rPr lang="fr-BE" b="1" dirty="0"/>
+              <a:t>Débit moyen selon taux de perte :</a:t>
+            </a:r>
+          </a:p>
+          <a:p>
+            <a:pPr marL="285750" indent="-285750">
+              <a:buFont typeface="Arial" panose="020B0604020202020204" pitchFamily="34" charset="0"/>
+              <a:buChar char="•"/>
+            </a:pPr>
+            <a:r>
+              <a:rPr lang="fr-BE" dirty="0"/>
+              <a:t>Meilleur qu’avec notre client pour 5 et 10% de perte </a:t>
+            </a:r>
+          </a:p>
+          <a:p>
+            <a:pPr marL="285750" indent="-285750">
+              <a:buFont typeface="Arial" panose="020B0604020202020204" pitchFamily="34" charset="0"/>
+              <a:buChar char="•"/>
+            </a:pPr>
+            <a:r>
+              <a:rPr lang="fr-BE" dirty="0"/>
+              <a:t>Débit nulle à 30% de perte</a:t>
+            </a:r>
+          </a:p>
+        </p:txBody>
+      </p:sp>
     </p:spTree>
     <p:extLst>
       <p:ext uri="{BB962C8B-B14F-4D97-AF65-F5344CB8AC3E}">
@@ -4312,7 +4368,7 @@
         </p:blipFill>
         <p:spPr>
           <a:xfrm>
-            <a:off x="211137" y="2438400"/>
+            <a:off x="207961" y="3293268"/>
             <a:ext cx="6126163" cy="3063082"/>
           </a:xfrm>
           <a:prstGeom prst="rect">
@@ -4377,7 +4433,7 @@
         </p:blipFill>
         <p:spPr>
           <a:xfrm>
-            <a:off x="6334124" y="2352675"/>
+            <a:off x="6334124" y="3204850"/>
             <a:ext cx="5669856" cy="3239917"/>
           </a:xfrm>
           <a:prstGeom prst="rect">
@@ -4385,6 +4441,77 @@
           </a:prstGeom>
         </p:spPr>
       </p:pic>
+      <p:sp>
+        <p:nvSpPr>
+          <p:cNvPr id="11" name="ZoneTexte 10">
+            <a:extLst>
+              <a:ext uri="{FF2B5EF4-FFF2-40B4-BE49-F238E27FC236}">
+                <a16:creationId xmlns:a16="http://schemas.microsoft.com/office/drawing/2014/main" id="{756AB09F-4899-3160-930B-69A68862CCF1}"/>
+              </a:ext>
+            </a:extLst>
+          </p:cNvPr>
+          <p:cNvSpPr txBox="1"/>
+          <p:nvPr/>
+        </p:nvSpPr>
+        <p:spPr>
+          <a:xfrm>
+            <a:off x="651128" y="1587974"/>
+            <a:ext cx="11365992" cy="1477328"/>
+          </a:xfrm>
+          <a:prstGeom prst="rect">
+            <a:avLst/>
+          </a:prstGeom>
+          <a:noFill/>
+        </p:spPr>
+        <p:txBody>
+          <a:bodyPr wrap="square" rtlCol="0">
+            <a:spAutoFit/>
+          </a:bodyPr>
+          <a:lstStyle/>
+          <a:p>
+            <a:r>
+              <a:rPr lang="fr-BE" b="1" dirty="0"/>
+              <a:t>Débit moyen selon taille des fichiers :</a:t>
+            </a:r>
+          </a:p>
+          <a:p>
+            <a:pPr marL="285750" indent="-285750">
+              <a:buFont typeface="Arial" panose="020B0604020202020204" pitchFamily="34" charset="0"/>
+              <a:buChar char="•"/>
+            </a:pPr>
+            <a:r>
+              <a:rPr lang="fr-BE" dirty="0"/>
+              <a:t>Similaire à celui avec notre serveur</a:t>
+            </a:r>
+          </a:p>
+          <a:p>
+            <a:r>
+              <a:rPr lang="fr-BE" b="1" dirty="0"/>
+              <a:t>Débit moyen selon taux de perte :</a:t>
+            </a:r>
+          </a:p>
+          <a:p>
+            <a:pPr marL="285750" indent="-285750">
+              <a:buFont typeface="Arial" panose="020B0604020202020204" pitchFamily="34" charset="0"/>
+              <a:buChar char="•"/>
+            </a:pPr>
+            <a:r>
+              <a:rPr lang="fr-BE" dirty="0"/>
+              <a:t>Débit sans perte plus faible qu’avec notre serveur</a:t>
+            </a:r>
+          </a:p>
+          <a:p>
+            <a:pPr marL="285750" indent="-285750">
+              <a:buFont typeface="Arial" panose="020B0604020202020204" pitchFamily="34" charset="0"/>
+              <a:buChar char="•"/>
+            </a:pPr>
+            <a:r>
+              <a:rPr lang="fr-BE" dirty="0"/>
+              <a:t>Similaire à celui avec notre serveur à partir de 5% de pertes</a:t>
+            </a:r>
+          </a:p>
+        </p:txBody>
+      </p:sp>
     </p:spTree>
     <p:extLst>
       <p:ext uri="{BB962C8B-B14F-4D97-AF65-F5344CB8AC3E}">
@@ -4473,7 +4600,7 @@
         </p:blipFill>
         <p:spPr>
           <a:xfrm>
-            <a:off x="268287" y="2414983"/>
+            <a:off x="257968" y="3337321"/>
             <a:ext cx="6038057" cy="3019029"/>
           </a:xfrm>
           <a:prstGeom prst="rect">
@@ -4538,14 +4665,85 @@
         </p:blipFill>
         <p:spPr>
           <a:xfrm>
-            <a:off x="6296025" y="2286000"/>
-            <a:ext cx="5693070" cy="3253183"/>
+            <a:off x="6296025" y="3204840"/>
+            <a:ext cx="5515143" cy="3151510"/>
           </a:xfrm>
           <a:prstGeom prst="rect">
             <a:avLst/>
           </a:prstGeom>
         </p:spPr>
       </p:pic>
+      <p:sp>
+        <p:nvSpPr>
+          <p:cNvPr id="11" name="ZoneTexte 10">
+            <a:extLst>
+              <a:ext uri="{FF2B5EF4-FFF2-40B4-BE49-F238E27FC236}">
+                <a16:creationId xmlns:a16="http://schemas.microsoft.com/office/drawing/2014/main" id="{E9D1786F-2836-3F58-1055-8E1BABB98737}"/>
+              </a:ext>
+            </a:extLst>
+          </p:cNvPr>
+          <p:cNvSpPr txBox="1"/>
+          <p:nvPr/>
+        </p:nvSpPr>
+        <p:spPr>
+          <a:xfrm>
+            <a:off x="613029" y="1569686"/>
+            <a:ext cx="11365992" cy="1477328"/>
+          </a:xfrm>
+          <a:prstGeom prst="rect">
+            <a:avLst/>
+          </a:prstGeom>
+          <a:noFill/>
+        </p:spPr>
+        <p:txBody>
+          <a:bodyPr wrap="square" rtlCol="0">
+            <a:spAutoFit/>
+          </a:bodyPr>
+          <a:lstStyle/>
+          <a:p>
+            <a:r>
+              <a:rPr lang="fr-BE" b="1" dirty="0"/>
+              <a:t>Débit moyen selon taille des fichiers :</a:t>
+            </a:r>
+          </a:p>
+          <a:p>
+            <a:pPr marL="285750" indent="-285750">
+              <a:buFont typeface="Arial" panose="020B0604020202020204" pitchFamily="34" charset="0"/>
+              <a:buChar char="•"/>
+            </a:pPr>
+            <a:r>
+              <a:rPr lang="fr-BE" dirty="0"/>
+              <a:t>Similaire à celui avec notre serveur</a:t>
+            </a:r>
+          </a:p>
+          <a:p>
+            <a:r>
+              <a:rPr lang="fr-BE" b="1" dirty="0"/>
+              <a:t>Débit moyen selon taux de perte :</a:t>
+            </a:r>
+          </a:p>
+          <a:p>
+            <a:pPr marL="285750" indent="-285750">
+              <a:buFont typeface="Arial" panose="020B0604020202020204" pitchFamily="34" charset="0"/>
+              <a:buChar char="•"/>
+            </a:pPr>
+            <a:r>
+              <a:rPr lang="fr-BE" dirty="0"/>
+              <a:t>Haut débit moyen malgré 5 à 20% de pertes</a:t>
+            </a:r>
+          </a:p>
+          <a:p>
+            <a:pPr marL="285750" indent="-285750">
+              <a:buFont typeface="Arial" panose="020B0604020202020204" pitchFamily="34" charset="0"/>
+              <a:buChar char="•"/>
+            </a:pPr>
+            <a:r>
+              <a:rPr lang="fr-BE" dirty="0"/>
+              <a:t>Débit nulle à 30% de pertes</a:t>
+            </a:r>
+          </a:p>
+        </p:txBody>
+      </p:sp>
     </p:spTree>
     <p:extLst>
       <p:ext uri="{BB962C8B-B14F-4D97-AF65-F5344CB8AC3E}">
@@ -4604,12 +4802,112 @@
           </a:p>
         </p:txBody>
       </p:sp>
+      <p:sp>
+        <p:nvSpPr>
+          <p:cNvPr id="4" name="Espace réservé du numéro de diapositive 3">
+            <a:extLst>
+              <a:ext uri="{FF2B5EF4-FFF2-40B4-BE49-F238E27FC236}">
+                <a16:creationId xmlns:a16="http://schemas.microsoft.com/office/drawing/2014/main" id="{BA3CB471-0A5B-C2DB-13AE-DE4DA2DEBA25}"/>
+              </a:ext>
+            </a:extLst>
+          </p:cNvPr>
+          <p:cNvSpPr>
+            <a:spLocks noGrp="1"/>
+          </p:cNvSpPr>
+          <p:nvPr>
+            <p:ph type="sldNum" sz="quarter" idx="12"/>
+          </p:nvPr>
+        </p:nvSpPr>
+        <p:spPr/>
+        <p:txBody>
+          <a:bodyPr/>
+          <a:lstStyle/>
+          <a:p>
+            <a:fld id="{6D78B8F9-767A-4546-9D20-2187B79FBE53}" type="slidenum">
+              <a:rPr lang="fr-BE" smtClean="0"/>
+              <a:t>15</a:t>
+            </a:fld>
+            <a:endParaRPr lang="fr-BE"/>
+          </a:p>
+        </p:txBody>
+      </p:sp>
+      <p:sp>
+        <p:nvSpPr>
+          <p:cNvPr id="9" name="ZoneTexte 8">
+            <a:extLst>
+              <a:ext uri="{FF2B5EF4-FFF2-40B4-BE49-F238E27FC236}">
+                <a16:creationId xmlns:a16="http://schemas.microsoft.com/office/drawing/2014/main" id="{8B14A3B3-1B28-03E6-6E0F-0B8DE24881C6}"/>
+              </a:ext>
+            </a:extLst>
+          </p:cNvPr>
+          <p:cNvSpPr txBox="1"/>
+          <p:nvPr/>
+        </p:nvSpPr>
+        <p:spPr>
+          <a:xfrm>
+            <a:off x="689259" y="1569264"/>
+            <a:ext cx="11365992" cy="1477328"/>
+          </a:xfrm>
+          <a:prstGeom prst="rect">
+            <a:avLst/>
+          </a:prstGeom>
+          <a:noFill/>
+        </p:spPr>
+        <p:txBody>
+          <a:bodyPr wrap="square" rtlCol="0">
+            <a:spAutoFit/>
+          </a:bodyPr>
+          <a:lstStyle/>
+          <a:p>
+            <a:r>
+              <a:rPr lang="fr-BE" b="1" dirty="0"/>
+              <a:t>Débit moyen selon taille des fichiers :</a:t>
+            </a:r>
+          </a:p>
+          <a:p>
+            <a:pPr marL="285750" indent="-285750">
+              <a:buFont typeface="Arial" panose="020B0604020202020204" pitchFamily="34" charset="0"/>
+              <a:buChar char="•"/>
+            </a:pPr>
+            <a:r>
+              <a:rPr lang="fr-BE" dirty="0"/>
+              <a:t>Plus de transfert au-delà de 2MB (problème du serveur dans la gestion des fichiers volumineux)</a:t>
+            </a:r>
+          </a:p>
+          <a:p>
+            <a:pPr marL="285750" indent="-285750">
+              <a:buFont typeface="Arial" panose="020B0604020202020204" pitchFamily="34" charset="0"/>
+              <a:buChar char="•"/>
+            </a:pPr>
+            <a:r>
+              <a:rPr lang="fr-BE" dirty="0"/>
+              <a:t>Baisse surprenante du débit de 50KB à 100KB</a:t>
+            </a:r>
+          </a:p>
+          <a:p>
+            <a:r>
+              <a:rPr lang="fr-BE" b="1" dirty="0"/>
+              <a:t>Débit moyen selon taux de perte :</a:t>
+            </a:r>
+          </a:p>
+          <a:p>
+            <a:pPr marL="285750" indent="-285750">
+              <a:buFont typeface="Arial" panose="020B0604020202020204" pitchFamily="34" charset="0"/>
+              <a:buChar char="•"/>
+            </a:pPr>
+            <a:r>
+              <a:rPr lang="fr-BE" dirty="0"/>
+              <a:t>Débit très élevé même avec nombreuses pertes (~20 KB à 30% de perte)</a:t>
+            </a:r>
+          </a:p>
+        </p:txBody>
+      </p:sp>
       <p:pic>
         <p:nvPicPr>
-          <p:cNvPr id="6" name="Espace réservé du contenu 5">
-            <a:extLst>
-              <a:ext uri="{FF2B5EF4-FFF2-40B4-BE49-F238E27FC236}">
-                <a16:creationId xmlns:a16="http://schemas.microsoft.com/office/drawing/2014/main" id="{7B2E3D63-4604-FBFB-6137-3D5CDCC1245D}"/>
+          <p:cNvPr id="10" name="Espace réservé du contenu 9">
+            <a:extLst>
+              <a:ext uri="{FF2B5EF4-FFF2-40B4-BE49-F238E27FC236}">
+                <a16:creationId xmlns:a16="http://schemas.microsoft.com/office/drawing/2014/main" id="{BA483148-C22C-1BA5-F10C-7FC420D95233}"/>
               </a:ext>
             </a:extLst>
           </p:cNvPr>
@@ -4634,49 +4932,20 @@
         </p:blipFill>
         <p:spPr>
           <a:xfrm>
-            <a:off x="220663" y="2581276"/>
-            <a:ext cx="5836444" cy="2918222"/>
+            <a:off x="387576" y="3379176"/>
+            <a:ext cx="5882540" cy="2941271"/>
           </a:xfrm>
           <a:prstGeom prst="rect">
             <a:avLst/>
           </a:prstGeom>
         </p:spPr>
       </p:pic>
-      <p:sp>
-        <p:nvSpPr>
-          <p:cNvPr id="4" name="Espace réservé du numéro de diapositive 3">
-            <a:extLst>
-              <a:ext uri="{FF2B5EF4-FFF2-40B4-BE49-F238E27FC236}">
-                <a16:creationId xmlns:a16="http://schemas.microsoft.com/office/drawing/2014/main" id="{BA3CB471-0A5B-C2DB-13AE-DE4DA2DEBA25}"/>
-              </a:ext>
-            </a:extLst>
-          </p:cNvPr>
-          <p:cNvSpPr>
-            <a:spLocks noGrp="1"/>
-          </p:cNvSpPr>
-          <p:nvPr>
-            <p:ph type="sldNum" sz="quarter" idx="12"/>
-          </p:nvPr>
-        </p:nvSpPr>
-        <p:spPr/>
-        <p:txBody>
-          <a:bodyPr/>
-          <a:lstStyle/>
-          <a:p>
-            <a:fld id="{6D78B8F9-767A-4546-9D20-2187B79FBE53}" type="slidenum">
-              <a:rPr lang="fr-BE" smtClean="0"/>
-              <a:t>15</a:t>
-            </a:fld>
-            <a:endParaRPr lang="fr-BE"/>
-          </a:p>
-        </p:txBody>
-      </p:sp>
       <p:pic>
         <p:nvPicPr>
-          <p:cNvPr id="8" name="Image 7">
-            <a:extLst>
-              <a:ext uri="{FF2B5EF4-FFF2-40B4-BE49-F238E27FC236}">
-                <a16:creationId xmlns:a16="http://schemas.microsoft.com/office/drawing/2014/main" id="{6C06F332-0350-9D88-6C5E-5594B07348A1}"/>
+          <p:cNvPr id="12" name="Image 11">
+            <a:extLst>
+              <a:ext uri="{FF2B5EF4-FFF2-40B4-BE49-F238E27FC236}">
+                <a16:creationId xmlns:a16="http://schemas.microsoft.com/office/drawing/2014/main" id="{3753373D-568F-4B94-A757-5420DD991844}"/>
               </a:ext>
             </a:extLst>
           </p:cNvPr>
@@ -4699,8 +4968,8 @@
         </p:blipFill>
         <p:spPr>
           <a:xfrm>
-            <a:off x="6095999" y="2454048"/>
-            <a:ext cx="5572125" cy="3184071"/>
+            <a:off x="6372255" y="3343275"/>
+            <a:ext cx="5272880" cy="3013075"/>
           </a:xfrm>
           <a:prstGeom prst="rect">
             <a:avLst/>
@@ -5656,8 +5925,8 @@
         </p:blipFill>
         <p:spPr>
           <a:xfrm>
-            <a:off x="643467" y="2106083"/>
-            <a:ext cx="5291666" cy="2645833"/>
+            <a:off x="88900" y="3535362"/>
+            <a:ext cx="6007100" cy="3003550"/>
           </a:xfrm>
           <a:prstGeom prst="rect">
             <a:avLst/>
@@ -5686,8 +5955,8 @@
         </p:blipFill>
         <p:spPr>
           <a:xfrm>
-            <a:off x="6587594" y="2106083"/>
-            <a:ext cx="4630209" cy="2645834"/>
+            <a:off x="6301200" y="3411537"/>
+            <a:ext cx="5472906" cy="3127375"/>
           </a:xfrm>
           <a:prstGeom prst="rect">
             <a:avLst/>
@@ -5779,10 +6048,98 @@
           <a:lstStyle/>
           <a:p>
             <a:r>
-              <a:rPr lang="fr-BE"/>
+              <a:rPr lang="fr-BE" dirty="0"/>
               <a:t>Graphiques de performances</a:t>
             </a:r>
-            <a:endParaRPr lang="fr-BE" dirty="0"/>
+          </a:p>
+        </p:txBody>
+      </p:sp>
+      <p:sp>
+        <p:nvSpPr>
+          <p:cNvPr id="3" name="ZoneTexte 2">
+            <a:extLst>
+              <a:ext uri="{FF2B5EF4-FFF2-40B4-BE49-F238E27FC236}">
+                <a16:creationId xmlns:a16="http://schemas.microsoft.com/office/drawing/2014/main" id="{920DFE43-0C83-60AB-E862-1A286521D999}"/>
+              </a:ext>
+            </a:extLst>
+          </p:cNvPr>
+          <p:cNvSpPr txBox="1"/>
+          <p:nvPr/>
+        </p:nvSpPr>
+        <p:spPr>
+          <a:xfrm>
+            <a:off x="826008" y="1397675"/>
+            <a:ext cx="11365992" cy="2031325"/>
+          </a:xfrm>
+          <a:prstGeom prst="rect">
+            <a:avLst/>
+          </a:prstGeom>
+          <a:noFill/>
+        </p:spPr>
+        <p:txBody>
+          <a:bodyPr wrap="square" rtlCol="0">
+            <a:spAutoFit/>
+          </a:bodyPr>
+          <a:lstStyle/>
+          <a:p>
+            <a:r>
+              <a:rPr lang="fr-BE" b="1" dirty="0"/>
+              <a:t>Débit moyen selon taille des fichiers :</a:t>
+            </a:r>
+          </a:p>
+          <a:p>
+            <a:pPr marL="285750" indent="-285750">
+              <a:buFont typeface="Arial" panose="020B0604020202020204" pitchFamily="34" charset="0"/>
+              <a:buChar char="•"/>
+            </a:pPr>
+            <a:r>
+              <a:rPr lang="fr-BE" dirty="0"/>
+              <a:t>Augmentation croissante du débit avec la taille -&gt; </a:t>
+            </a:r>
+            <a:r>
+              <a:rPr lang="fr-FR" dirty="0"/>
+              <a:t>amortissement des coûts fixes, utilisation du pipeline (fenêtre glissante), réduction de l’impact du RTT</a:t>
+            </a:r>
+          </a:p>
+          <a:p>
+            <a:pPr marL="285750" indent="-285750">
+              <a:buFont typeface="Arial" panose="020B0604020202020204" pitchFamily="34" charset="0"/>
+              <a:buChar char="•"/>
+            </a:pPr>
+            <a:r>
+              <a:rPr lang="fr-FR" dirty="0"/>
+              <a:t>Stabilisation à partir de 5MB -&gt; </a:t>
+            </a:r>
+            <a:r>
+              <a:rPr lang="fr-BE" dirty="0"/>
+              <a:t>débit maximum du système atteint</a:t>
+            </a:r>
+          </a:p>
+          <a:p>
+            <a:r>
+              <a:rPr lang="fr-BE" b="1" dirty="0"/>
+              <a:t>Débit moyen selon taux de perte :</a:t>
+            </a:r>
+          </a:p>
+          <a:p>
+            <a:pPr marL="285750" indent="-285750">
+              <a:buFont typeface="Arial" panose="020B0604020202020204" pitchFamily="34" charset="0"/>
+              <a:buChar char="•"/>
+            </a:pPr>
+            <a:r>
+              <a:rPr lang="fr-BE" dirty="0"/>
+              <a:t>Chute du débit dès 5% de pertes -&gt; retransmissions et timeouts saturent le protocole</a:t>
+            </a:r>
+          </a:p>
+          <a:p>
+            <a:pPr marL="285750" indent="-285750">
+              <a:buFont typeface="Arial" panose="020B0604020202020204" pitchFamily="34" charset="0"/>
+              <a:buChar char="•"/>
+            </a:pPr>
+            <a:r>
+              <a:rPr lang="fr-BE" dirty="0"/>
+              <a:t>Débit stable de 5 à 20% -&gt; protocole déjà saturé par retransmissions et timeout</a:t>
+            </a:r>
           </a:p>
         </p:txBody>
       </p:sp>
